--- a/DBTUNING/ch34_IO구성_OS자원관리/ch34_IO구성과OS자원관리.pptx
+++ b/DBTUNING/ch34_IO구성_OS자원관리/ch34_IO구성과OS자원관리.pptx
@@ -1586,7 +1586,7 @@
           <a:lstStyle/>
           <a:p>
             <a:r>
-              <a:t>1장에서 세운 측정, 진단, 조치, 재측정 순환을 I/O·OS 진단에 그대로 대입하면 스무 개 장이 하나의 방법론이었음이 드러납니다. 측정은 DB Time을 축으로 대기를 분해하고, 진단은 병목이 DB 안인지 밖인지를 가르며, 조치는 원인별로 하되 스와핑이면 SGA를 키우지 않습니다. 재측정은 같은 지표를 델타로 다시 잽니다. 20장의 역할은 DB 안과 밖의 경계를 긋는 것입니다.</a:t>
+              <a:t>ch15에서 세운 측정, 진단, 조치, 재측정 순환을 I/O·OS 진단에 그대로 대입하면 스무 개 장이 하나의 방법론이었음이 드러납니다. 측정은 DB Time을 축으로 대기를 분해하고, 진단은 병목이 DB 안인지 밖인지를 가르며, 조치는 원인별로 하되 스와핑이면 SGA를 키우지 않습니다. 재측정은 같은 지표를 델타로 다시 잽니다. ch34의 역할은 DB 안과 밖의 경계를 긋는 것입니다.</a:t>
             </a:r>
           </a:p>
         </p:txBody>
@@ -5356,7 +5356,7 @@
                 </a:solidFill>
                 <a:latin typeface="맑은 고딕"/>
               </a:rPr>
-              <a:t>제20장</a:t>
+              <a:t>제ch34</a:t>
             </a:r>
           </a:p>
         </p:txBody>
@@ -10100,7 +10100,7 @@
                 </a:solidFill>
                 <a:latin typeface="맑은 고딕"/>
               </a:rPr>
-              <a:t>•  실측: 물리 약 7.5GiB, ASMM 운영(16장)</a:t>
+              <a:t>•  실측: 물리 약 7.5GiB, ASMM 운영(ch29)</a:t>
             </a:r>
           </a:p>
           <a:p>
@@ -11371,7 +11371,7 @@
                 </a:solidFill>
                 <a:latin typeface="맑은 고딕"/>
               </a:rPr>
-              <a:t>1장에서 20장까지 하나의 방법론</a:t>
+              <a:t>ch15에서 ch34까지 하나의 방법론</a:t>
             </a:r>
           </a:p>
         </p:txBody>

--- a/DBTUNING/ch34_IO구성_OS자원관리/ch34_IO구성과OS자원관리.pptx
+++ b/DBTUNING/ch34_IO구성_OS자원관리/ch34_IO구성과OS자원관리.pptx
@@ -5356,7 +5356,7 @@
                 </a:solidFill>
                 <a:latin typeface="맑은 고딕"/>
               </a:rPr>
-              <a:t>제ch34</a:t>
+              <a:t>ch34</a:t>
             </a:r>
           </a:p>
         </p:txBody>

--- a/DBTUNING/ch34_IO구성_OS자원관리/ch34_IO구성과OS자원관리.pptx
+++ b/DBTUNING/ch34_IO구성_OS자원관리/ch34_IO구성과OS자원관리.pptx
@@ -5452,7 +5452,7 @@
                 </a:solidFill>
                 <a:latin typeface="맑은 고딕"/>
               </a:rPr>
-              <a:t>20.3</a:t>
+              <a:t>34.3</a:t>
             </a:r>
           </a:p>
         </p:txBody>
@@ -7059,7 +7059,7 @@
                 </a:solidFill>
                 <a:latin typeface="맑은 고딕"/>
               </a:rPr>
-              <a:t>20.4</a:t>
+              <a:t>34.4</a:t>
             </a:r>
           </a:p>
         </p:txBody>
@@ -8534,7 +8534,7 @@
                 </a:solidFill>
                 <a:latin typeface="맑은 고딕"/>
               </a:rPr>
-              <a:t>20.5</a:t>
+              <a:t>34.5</a:t>
             </a:r>
           </a:p>
         </p:txBody>
@@ -10228,7 +10228,7 @@
                 </a:solidFill>
                 <a:latin typeface="맑은 고딕"/>
               </a:rPr>
-              <a:t>20.6</a:t>
+              <a:t>34.6</a:t>
             </a:r>
           </a:p>
         </p:txBody>
@@ -10714,7 +10714,7 @@
                 </a:solidFill>
                 <a:latin typeface="맑은 고딕"/>
               </a:rPr>
-              <a:t>•  20.2  데이터파일별 I/O 분포 — 편중 판별</a:t>
+              <a:t>•  34.2  데이터파일별 I/O 분포 — 편중 판별</a:t>
             </a:r>
           </a:p>
           <a:p>
@@ -10730,7 +10730,7 @@
                 </a:solidFill>
                 <a:latin typeface="맑은 고딕"/>
               </a:rPr>
-              <a:t>•  20.3  I/O 캘리브레이션 — CALIBRATE_IO</a:t>
+              <a:t>•  34.3  I/O 캘리브레이션 — CALIBRATE_IO</a:t>
             </a:r>
           </a:p>
           <a:p>
@@ -10746,7 +10746,7 @@
                 </a:solidFill>
                 <a:latin typeface="맑은 고딕"/>
               </a:rPr>
-              <a:t>•  20.4  비동기 I/O와 다중 블록 읽기</a:t>
+              <a:t>•  34.4  비동기 I/O와 다중 블록 읽기</a:t>
             </a:r>
           </a:p>
           <a:p>
@@ -10762,7 +10762,7 @@
                 </a:solidFill>
                 <a:latin typeface="맑은 고딕"/>
               </a:rPr>
-              <a:t>•  20.5  병목이 DB 안인가 밖인가 — OS 자원 판별</a:t>
+              <a:t>•  34.5  병목이 DB 안인가 밖인가 — OS 자원 판별</a:t>
             </a:r>
           </a:p>
           <a:p>
@@ -10778,7 +10778,7 @@
                 </a:solidFill>
                 <a:latin typeface="맑은 고딕"/>
               </a:rPr>
-              <a:t>•  20.6  네트워크 지연 오판 — SQL*Net message from client</a:t>
+              <a:t>•  34.6  네트워크 지연 오판 — SQL*Net message from client</a:t>
             </a:r>
           </a:p>
           <a:p>
@@ -10794,7 +10794,7 @@
                 </a:solidFill>
                 <a:latin typeface="맑은 고딕"/>
               </a:rPr>
-              <a:t>•  20.7  측정 → 진단 → 조치 → 재측정 (과정 전체 종합)</a:t>
+              <a:t>•  34.7  측정 → 진단 → 조치 → 재측정 (과정 전체 종합)</a:t>
             </a:r>
           </a:p>
         </p:txBody>
@@ -11107,7 +11107,7 @@
                 </a:solidFill>
                 <a:latin typeface="맑은 고딕"/>
               </a:rPr>
-              <a:t>20.7</a:t>
+              <a:t>34.7</a:t>
             </a:r>
           </a:p>
         </p:txBody>
@@ -12263,7 +12263,7 @@
                 </a:solidFill>
                 <a:latin typeface="맑은 고딕"/>
               </a:rPr>
-              <a:t>20.2</a:t>
+              <a:t>34.2</a:t>
             </a:r>
           </a:p>
         </p:txBody>

--- a/DBTUNING/ch34_IO구성_OS자원관리/ch34_IO구성과OS자원관리.pptx
+++ b/DBTUNING/ch34_IO구성_OS자원관리/ch34_IO구성과OS자원관리.pptx
@@ -35,6 +35,11 @@
     <p:sldId id="283" r:id="rId35"/>
     <p:sldId id="284" r:id="rId36"/>
     <p:sldId id="285" r:id="rId37"/>
+    <p:sldId id="291" r:id="rId43"/>
+    <p:sldId id="292" r:id="rId44"/>
+    <p:sldId id="293" r:id="rId45"/>
+    <p:sldId id="294" r:id="rId46"/>
+    <p:sldId id="295" r:id="rId47"/>
     <p:sldId id="286" r:id="rId38"/>
     <p:sldId id="287" r:id="rId39"/>
     <p:sldId id="288" r:id="rId40"/>
@@ -1587,6 +1592,356 @@
           <a:p>
             <a:r>
               <a:t>ch15에서 세운 측정, 진단, 조치, 재측정 순환을 I/O·OS 진단에 그대로 대입하면 스무 개 장이 하나의 방법론이었음이 드러납니다. 측정은 DB Time을 축으로 대기를 분해하고, 진단은 병목이 DB 안인지 밖인지를 가르며, 조치는 원인별로 하되 스와핑이면 SGA를 키우지 않습니다. 재측정은 같은 지표를 델타로 다시 잽니다. ch34의 역할은 DB 안과 밖의 경계를 긋는 것입니다.</a:t>
+            </a:r>
+          </a:p>
+        </p:txBody>
+      </p:sp>
+      <p:sp>
+        <p:nvSpPr>
+          <p:cNvPr id="4" name="Slide Number Placeholder 3"/>
+          <p:cNvSpPr>
+            <a:spLocks noGrp="1"/>
+          </p:cNvSpPr>
+          <p:nvPr>
+            <p:ph type="sldNum" idx="5" sz="quarter"/>
+          </p:nvPr>
+        </p:nvSpPr>
+        <p:spPr/>
+      </p:sp>
+    </p:spTree>
+  </p:cSld>
+  <p:clrMapOvr>
+    <a:masterClrMapping/>
+  </p:clrMapOvr>
+</p:notes>
+</file>
+
+<file path=ppt/notesSlides/notesSlide24.xml><?xml version="1.0" encoding="utf-8"?>
+<p:notes xmlns:a="http://schemas.openxmlformats.org/drawingml/2006/main" xmlns:p="http://schemas.openxmlformats.org/presentationml/2006/main" xmlns:r="http://schemas.openxmlformats.org/officeDocument/2006/relationships">
+  <p:cSld>
+    <p:spTree>
+      <p:nvGrpSpPr>
+        <p:cNvPr id="1" name=""/>
+        <p:cNvGrpSpPr/>
+        <p:nvPr/>
+      </p:nvGrpSpPr>
+      <p:grpSpPr>
+        <a:xfrm>
+          <a:off x="0" y="0"/>
+          <a:ext cx="0" cy="0"/>
+          <a:chOff x="0" y="0"/>
+          <a:chExt cx="0" cy="0"/>
+        </a:xfrm>
+      </p:grpSpPr>
+      <p:sp>
+        <p:nvSpPr>
+          <p:cNvPr id="2" name="Slide Image Placeholder 1"/>
+          <p:cNvSpPr>
+            <a:spLocks noGrp="1"/>
+          </p:cNvSpPr>
+          <p:nvPr>
+            <p:ph type="sldImg" idx="2"/>
+          </p:nvPr>
+        </p:nvSpPr>
+        <p:spPr/>
+      </p:sp>
+      <p:sp>
+        <p:nvSpPr>
+          <p:cNvPr id="3" name="Notes Placeholder 2"/>
+          <p:cNvSpPr>
+            <a:spLocks noGrp="1"/>
+          </p:cNvSpPr>
+          <p:nvPr>
+            <p:ph type="body" idx="3" sz="quarter"/>
+          </p:nvPr>
+        </p:nvSpPr>
+        <p:spPr/>
+        <p:txBody>
+          <a:bodyPr/>
+          <a:lstStyle/>
+          <a:p>
+            <a:r>
+              <a:t>리소스 관리자 절의 시작이다. 앞 절들이 'DB 밖(스토리지·CPU·네트워크)이 병목인가'를 가렸다면, 이 절은 'DB 안에서 자원을 어떻게 나눠 줄 것인가'를 다룬다. 자원이 모자랄 때 누구에게 먼저 줄지 정하는 장치라는 점을 먼저 못 박고 시작한다. 자원을 늘려 주는 기능이 아니다.</a:t>
+            </a:r>
+          </a:p>
+        </p:txBody>
+      </p:sp>
+      <p:sp>
+        <p:nvSpPr>
+          <p:cNvPr id="4" name="Slide Number Placeholder 3"/>
+          <p:cNvSpPr>
+            <a:spLocks noGrp="1"/>
+          </p:cNvSpPr>
+          <p:nvPr>
+            <p:ph type="sldNum" idx="5" sz="quarter"/>
+          </p:nvPr>
+        </p:nvSpPr>
+        <p:spPr/>
+      </p:sp>
+    </p:spTree>
+  </p:cSld>
+  <p:clrMapOvr>
+    <a:masterClrMapping/>
+  </p:clrMapOvr>
+</p:notes>
+</file>
+
+<file path=ppt/notesSlides/notesSlide25.xml><?xml version="1.0" encoding="utf-8"?>
+<p:notes xmlns:a="http://schemas.openxmlformats.org/drawingml/2006/main" xmlns:p="http://schemas.openxmlformats.org/presentationml/2006/main" xmlns:r="http://schemas.openxmlformats.org/officeDocument/2006/relationships">
+  <p:cSld>
+    <p:spTree>
+      <p:nvGrpSpPr>
+        <p:cNvPr id="1" name=""/>
+        <p:cNvGrpSpPr/>
+        <p:nvPr/>
+      </p:nvGrpSpPr>
+      <p:grpSpPr>
+        <a:xfrm>
+          <a:off x="0" y="0"/>
+          <a:ext cx="0" cy="0"/>
+          <a:chOff x="0" y="0"/>
+          <a:chExt cx="0" cy="0"/>
+        </a:xfrm>
+      </p:grpSpPr>
+      <p:sp>
+        <p:nvSpPr>
+          <p:cNvPr id="2" name="Slide Image Placeholder 1"/>
+          <p:cNvSpPr>
+            <a:spLocks noGrp="1"/>
+          </p:cNvSpPr>
+          <p:nvPr>
+            <p:ph type="sldImg" idx="2"/>
+          </p:nvPr>
+        </p:nvSpPr>
+        <p:spPr/>
+      </p:sp>
+      <p:sp>
+        <p:nvSpPr>
+          <p:cNvPr id="3" name="Notes Placeholder 2"/>
+          <p:cNvSpPr>
+            <a:spLocks noGrp="1"/>
+          </p:cNvSpPr>
+          <p:nvPr>
+            <p:ph type="body" idx="3" sz="quarter"/>
+          </p:nvPr>
+        </p:nvSpPr>
+        <p:spPr/>
+        <p:txBody>
+          <a:bodyPr/>
+          <a:lstStyle/>
+          <a:p>
+            <a:r>
+              <a:t>리소스 관리자가 필요한 이유를 먼저 설명한다. OS 입장에서는 야간 배치 세션과 온라인 조회 세션이 똑같은 oracle 서버 프로세스다. nice 값으로도 구분할 수 없다. 세션의 정체를 아는 것은 DB 뿐이므로 배분도 DB 가 해야 한다. 그리고 CPU 가 남아돌 때는 어떤 제한도 걸리지 않는다는 점을 강조한다. 경합이 있어야 비율이 의미를 가진다 — 수강생이 가장 자주 오해하는 지점이다.</a:t>
+            </a:r>
+          </a:p>
+        </p:txBody>
+      </p:sp>
+      <p:sp>
+        <p:nvSpPr>
+          <p:cNvPr id="4" name="Slide Number Placeholder 3"/>
+          <p:cNvSpPr>
+            <a:spLocks noGrp="1"/>
+          </p:cNvSpPr>
+          <p:nvPr>
+            <p:ph type="sldNum" idx="5" sz="quarter"/>
+          </p:nvPr>
+        </p:nvSpPr>
+        <p:spPr/>
+      </p:sp>
+    </p:spTree>
+  </p:cSld>
+  <p:clrMapOvr>
+    <a:masterClrMapping/>
+  </p:clrMapOvr>
+</p:notes>
+</file>
+
+<file path=ppt/notesSlides/notesSlide26.xml><?xml version="1.0" encoding="utf-8"?>
+<p:notes xmlns:a="http://schemas.openxmlformats.org/drawingml/2006/main" xmlns:p="http://schemas.openxmlformats.org/presentationml/2006/main" xmlns:r="http://schemas.openxmlformats.org/officeDocument/2006/relationships">
+  <p:cSld>
+    <p:spTree>
+      <p:nvGrpSpPr>
+        <p:cNvPr id="1" name=""/>
+        <p:cNvGrpSpPr/>
+        <p:nvPr/>
+      </p:nvGrpSpPr>
+      <p:grpSpPr>
+        <a:xfrm>
+          <a:off x="0" y="0"/>
+          <a:ext cx="0" cy="0"/>
+          <a:chOff x="0" y="0"/>
+          <a:chExt cx="0" cy="0"/>
+        </a:xfrm>
+      </p:grpSpPr>
+      <p:sp>
+        <p:nvSpPr>
+          <p:cNvPr id="2" name="Slide Image Placeholder 1"/>
+          <p:cNvSpPr>
+            <a:spLocks noGrp="1"/>
+          </p:cNvSpPr>
+          <p:nvPr>
+            <p:ph type="sldImg" idx="2"/>
+          </p:nvPr>
+        </p:nvSpPr>
+        <p:spPr/>
+      </p:sp>
+      <p:sp>
+        <p:nvSpPr>
+          <p:cNvPr id="3" name="Notes Placeholder 2"/>
+          <p:cNvSpPr>
+            <a:spLocks noGrp="1"/>
+          </p:cNvSpPr>
+          <p:nvPr>
+            <p:ph type="body" idx="3" sz="quarter"/>
+          </p:nvPr>
+        </p:nvSpPr>
+        <p:spPr/>
+        <p:txBody>
+          <a:bodyPr/>
+          <a:lstStyle/>
+          <a:p>
+            <a:r>
+              <a:t>구성 순서를 손으로 따라가게 한다. 모든 변경은 Pending Area 를 거치고, 개별 호출이 통과해도 SUBMIT 에서 검증된다는 점이 핵심이다. 화면의 ORA-29377 은 OTHER_GROUPS 지시어를 빼고 SUBMIT 했을 때 실제로 나온 오류다. 최상위 플랜에는 OTHER_GROUPS 가 반드시 있어야 한다 — 어느 그룹에도 매핑되지 않은 세션이 갈 곳이기 때문이다. SUBMIT 앞에 VALIDATE_PENDING_AREA 를 습관처럼 두라고 일러 둔다.</a:t>
+            </a:r>
+          </a:p>
+        </p:txBody>
+      </p:sp>
+      <p:sp>
+        <p:nvSpPr>
+          <p:cNvPr id="4" name="Slide Number Placeholder 3"/>
+          <p:cNvSpPr>
+            <a:spLocks noGrp="1"/>
+          </p:cNvSpPr>
+          <p:nvPr>
+            <p:ph type="sldNum" idx="5" sz="quarter"/>
+          </p:nvPr>
+        </p:nvSpPr>
+        <p:spPr/>
+      </p:sp>
+    </p:spTree>
+  </p:cSld>
+  <p:clrMapOvr>
+    <a:masterClrMapping/>
+  </p:clrMapOvr>
+</p:notes>
+</file>
+
+<file path=ppt/notesSlides/notesSlide27.xml><?xml version="1.0" encoding="utf-8"?>
+<p:notes xmlns:a="http://schemas.openxmlformats.org/drawingml/2006/main" xmlns:p="http://schemas.openxmlformats.org/presentationml/2006/main" xmlns:r="http://schemas.openxmlformats.org/officeDocument/2006/relationships">
+  <p:cSld>
+    <p:spTree>
+      <p:nvGrpSpPr>
+        <p:cNvPr id="1" name=""/>
+        <p:cNvGrpSpPr/>
+        <p:nvPr/>
+      </p:nvGrpSpPr>
+      <p:grpSpPr>
+        <a:xfrm>
+          <a:off x="0" y="0"/>
+          <a:ext cx="0" cy="0"/>
+          <a:chOff x="0" y="0"/>
+          <a:chExt cx="0" cy="0"/>
+        </a:xfrm>
+      </p:grpSpPr>
+      <p:sp>
+        <p:nvSpPr>
+          <p:cNvPr id="2" name="Slide Image Placeholder 1"/>
+          <p:cNvSpPr>
+            <a:spLocks noGrp="1"/>
+          </p:cNvSpPr>
+          <p:nvPr>
+            <p:ph type="sldImg" idx="2"/>
+          </p:nvPr>
+        </p:nvSpPr>
+        <p:spPr/>
+      </p:sp>
+      <p:sp>
+        <p:nvSpPr>
+          <p:cNvPr id="3" name="Notes Placeholder 2"/>
+          <p:cNvSpPr>
+            <a:spLocks noGrp="1"/>
+          </p:cNvSpPr>
+          <p:nvPr>
+            <p:ph type="body" idx="3" sz="quarter"/>
+          </p:nvPr>
+        </p:nvSpPr>
+        <p:spPr/>
+        <p:txBody>
+          <a:bodyPr/>
+          <a:lstStyle/>
+          <a:p>
+            <a:r>
+              <a:t>교재가 다루지 않는 마지막 한 걸음이다. 소비자 그룹과 플랜과 지시어를 다 만들어도 RESOURCE_MANAGER_PLAN 에 걸지 않으면 한 줄도 동작하지 않는다. V$RSRC_PLAN 의 CPU_MANAGED 가 ON 인지로 확인한다. 아래 표는 활성 세션 풀을 1 로 조이고 세션 두 개를 동시에 띄운 실측이다. 한 세션은 큐에 들어가 resmgr:become active 로 기다리다 30 초를 넘겨 ORA-07454 를 받았다. 큐 타임아웃은 곧 업무 실패라는 점을 짚는다.</a:t>
+            </a:r>
+          </a:p>
+        </p:txBody>
+      </p:sp>
+      <p:sp>
+        <p:nvSpPr>
+          <p:cNvPr id="4" name="Slide Number Placeholder 3"/>
+          <p:cNvSpPr>
+            <a:spLocks noGrp="1"/>
+          </p:cNvSpPr>
+          <p:nvPr>
+            <p:ph type="sldNum" idx="5" sz="quarter"/>
+          </p:nvPr>
+        </p:nvSpPr>
+        <p:spPr/>
+      </p:sp>
+    </p:spTree>
+  </p:cSld>
+  <p:clrMapOvr>
+    <a:masterClrMapping/>
+  </p:clrMapOvr>
+</p:notes>
+</file>
+
+<file path=ppt/notesSlides/notesSlide28.xml><?xml version="1.0" encoding="utf-8"?>
+<p:notes xmlns:a="http://schemas.openxmlformats.org/drawingml/2006/main" xmlns:p="http://schemas.openxmlformats.org/presentationml/2006/main" xmlns:r="http://schemas.openxmlformats.org/officeDocument/2006/relationships">
+  <p:cSld>
+    <p:spTree>
+      <p:nvGrpSpPr>
+        <p:cNvPr id="1" name=""/>
+        <p:cNvGrpSpPr/>
+        <p:nvPr/>
+      </p:nvGrpSpPr>
+      <p:grpSpPr>
+        <a:xfrm>
+          <a:off x="0" y="0"/>
+          <a:ext cx="0" cy="0"/>
+          <a:chOff x="0" y="0"/>
+          <a:chExt cx="0" cy="0"/>
+        </a:xfrm>
+      </p:grpSpPr>
+      <p:sp>
+        <p:nvSpPr>
+          <p:cNvPr id="2" name="Slide Image Placeholder 1"/>
+          <p:cNvSpPr>
+            <a:spLocks noGrp="1"/>
+          </p:cNvSpPr>
+          <p:nvPr>
+            <p:ph type="sldImg" idx="2"/>
+          </p:nvPr>
+        </p:nvSpPr>
+        <p:spPr/>
+      </p:sp>
+      <p:sp>
+        <p:nvSpPr>
+          <p:cNvPr id="3" name="Notes Placeholder 2"/>
+          <p:cNvSpPr>
+            <a:spLocks noGrp="1"/>
+          </p:cNvSpPr>
+          <p:nvPr>
+            <p:ph type="body" idx="3" sz="quarter"/>
+          </p:nvPr>
+        </p:nvSpPr>
+        <p:spPr/>
+        <p:txBody>
+          <a:bodyPr/>
+          <a:lstStyle/>
+          <a:p>
+            <a:r>
+              <a:t>교재를 그대로 따라 하면 19c 에서 걸리는 네 곳이다. 앞의 셋은 오류로 막히므로 금방 알아채지만, 마지막 DEFAULT_PLAN 건은 성공해 버리기 때문에 더 위험하다. MANDATORY='YES' 는 삭제 금지일 뿐 수정 금지가 아니다. Oracle 공급 플랜이 조용히 바뀐 채 남고 다음 사람은 영문을 모른다. 자기 플랜에만 지시어를 걸고 실습 뒤에는 반드시 원복하라고 마무리한다.</a:t>
             </a:r>
           </a:p>
         </p:txBody>
@@ -10794,7 +11149,23 @@
                 </a:solidFill>
                 <a:latin typeface="맑은 고딕"/>
               </a:rPr>
-              <a:t>•  34.7  측정 → 진단 → 조치 → 재측정 (과정 전체 종합)</a:t>
+              <a:t>•  34.8  측정 → 진단 → 조치 → 재측정 (과정 전체 종합)</a:t>
+            </a:r>
+          </a:p>
+          <a:p>
+            <a:pPr>
+              <a:spcAft>
+                <a:spcPts val="600"/>
+              </a:spcAft>
+            </a:pPr>
+            <a:r>
+              <a:rPr sz="1600" b="0">
+                <a:solidFill>
+                  <a:srgbClr val="222222"/>
+                </a:solidFill>
+                <a:latin typeface="맑은 고딕"/>
+              </a:rPr>
+              <a:t>•  34.7  리소스 관리자 — CPU 할당과 활성 세션 풀</a:t>
             </a:r>
           </a:p>
         </p:txBody>
@@ -11141,7 +11512,7 @@
                 </a:solidFill>
                 <a:latin typeface="맑은 고딕"/>
               </a:rPr>
-              <a:t>측정 → 진단 → 조치 → 재측정</a:t>
+              <a:t>리소스 관리자 — DB 가 자원을 나눠 준다</a:t>
             </a:r>
           </a:p>
         </p:txBody>
@@ -11219,7 +11590,7 @@
                 </a:solidFill>
                 <a:latin typeface="맑은 고딕"/>
               </a:rPr>
-              <a:t>•  20개 장을 하나의 순환으로</a:t>
+              <a:t>•  소비자 그룹 → 플랜 → 지시어 → 매핑 → 활성화</a:t>
             </a:r>
           </a:p>
           <a:p>
@@ -11230,7 +11601,7 @@
                 </a:solidFill>
                 <a:latin typeface="맑은 고딕"/>
               </a:rPr>
-              <a:t>•  병목이 DB 안인가 밖인가를 가른다</a:t>
+              <a:t>•  EMPHASIS(백분율)와 RATIO(가중치)</a:t>
             </a:r>
           </a:p>
           <a:p>
@@ -11241,7 +11612,7 @@
                 </a:solidFill>
                 <a:latin typeface="맑은 고딕"/>
               </a:rPr>
-              <a:t>•  근거를 가지고 옳은 팀에 넘긴다</a:t>
+              <a:t>•  활성 세션 풀 — 동시 실행 수를 막고 큐에 세운다</a:t>
             </a:r>
           </a:p>
         </p:txBody>
@@ -11337,7 +11708,7 @@
                 </a:solidFill>
                 <a:latin typeface="맑은 고딕"/>
               </a:rPr>
-              <a:t>과정 전체를 한 번 꿰다</a:t>
+              <a:t>리소스 관리자가 하는 일</a:t>
             </a:r>
           </a:p>
         </p:txBody>
@@ -11371,7 +11742,7 @@
                 </a:solidFill>
                 <a:latin typeface="맑은 고딕"/>
               </a:rPr>
-              <a:t>ch15에서 ch34까지 하나의 방법론</a:t>
+              <a:t>OS 가 아니라 DB 가 나눈다</a:t>
             </a:r>
           </a:p>
         </p:txBody>
@@ -11410,7 +11781,7 @@
                 </a:solidFill>
                 <a:latin typeface="맑은 고딕"/>
               </a:rPr>
-              <a:t>•  측정: DB Time → 대기 분해 → I/O면 V$FILESTAT, 자원이면 V$OSSTAT</a:t>
+              <a:t>•  OS 는 세션을 구분하지 못한다 — 배치도 온라인도 같은 서버 프로세스로 보인다</a:t>
             </a:r>
           </a:p>
           <a:p>
@@ -11426,7 +11797,7 @@
                 </a:solidFill>
                 <a:latin typeface="맑은 고딕"/>
               </a:rPr>
-              <a:t>•  진단: 병목이 DB 안(SQL·구성·메모리)인가 밖(스토리지·CPU·메모리·네트워크)인가</a:t>
+              <a:t>•  소비자 그룹으로 세션을 묶고, 플랜 지시어로 CPU·동시 세션 수를 배분한다</a:t>
             </a:r>
           </a:p>
           <a:p>
@@ -11442,7 +11813,7 @@
                 </a:solidFill>
                 <a:latin typeface="맑은 고딕"/>
               </a:rPr>
-              <a:t>•  조치: 원인별 처방 — 스와핑이면 SGA를 키우지 않는다</a:t>
+              <a:t>•  CPU 가 남으면 아무도 제한하지 않는다 — 경합할 때만 비율이 의미를 가진다</a:t>
             </a:r>
           </a:p>
           <a:p>
@@ -11458,23 +11829,7 @@
                 </a:solidFill>
                 <a:latin typeface="맑은 고딕"/>
               </a:rPr>
-              <a:t>•  재측정: 같은 지표를 델타로 다시 재어 판정 (조치 전 캡처 필수)</a:t>
-            </a:r>
-          </a:p>
-          <a:p>
-            <a:pPr>
-              <a:spcAft>
-                <a:spcPts val="600"/>
-              </a:spcAft>
-            </a:pPr>
-            <a:r>
-              <a:rPr sz="1600" b="0">
-                <a:solidFill>
-                  <a:srgbClr val="222222"/>
-                </a:solidFill>
-                <a:latin typeface="맑은 고딕"/>
-              </a:rPr>
-              <a:t>•  경계 긋기: SQL은 SQL 튜닝으로, 자원 부족은 인프라 증설로</a:t>
+              <a:t>•  Enterprise Edition 기본 기능 — 별도 팩 라이선스가 필요 없다</a:t>
             </a:r>
           </a:p>
         </p:txBody>
@@ -11570,7 +11925,7 @@
                 </a:solidFill>
                 <a:latin typeface="맑은 고딕"/>
               </a:rPr>
-              <a:t>퀴즈 (Quiz)</a:t>
+              <a:t>구성 순서와 SUBMIT 검증</a:t>
             </a:r>
           </a:p>
         </p:txBody>
@@ -11583,8 +11938,8 @@
         </p:nvSpPr>
         <p:spPr>
           <a:xfrm>
-            <a:off x="640080" y="1371600"/>
-            <a:ext cx="10881360" cy="5120640"/>
+            <a:off x="640080" y="1078992"/>
+            <a:ext cx="10881360" cy="457200"/>
           </a:xfrm>
           <a:prstGeom prst="rect">
             <a:avLst/>
@@ -11597,99 +11952,231 @@
           </a:bodyPr>
           <a:lstStyle/>
           <a:p>
-            <a:pPr>
-              <a:spcAft>
-                <a:spcPts val="600"/>
-              </a:spcAft>
-            </a:pPr>
-            <a:r>
-              <a:rPr sz="1600" b="0">
-                <a:solidFill>
-                  <a:srgbClr val="222222"/>
-                </a:solidFill>
-                <a:latin typeface="맑은 고딕"/>
-              </a:rPr>
-              <a:t>•  Q1. undo=쓰기·system=읽기 편중이 문제가 아닌 이유는?</a:t>
-            </a:r>
-          </a:p>
-          <a:p>
-            <a:pPr>
-              <a:spcAft>
-                <a:spcPts val="600"/>
-              </a:spcAft>
-            </a:pPr>
-            <a:r>
-              <a:rPr sz="1600" b="0">
-                <a:solidFill>
-                  <a:srgbClr val="222222"/>
-                </a:solidFill>
-                <a:latin typeface="맑은 고딕"/>
-              </a:rPr>
-              <a:t>•  Q2. MBRC·SREADTIM·MREADTIM이 NULL이면 무엇을 뜻하고 무엇을 하는가?</a:t>
-            </a:r>
-          </a:p>
-          <a:p>
-            <a:pPr>
-              <a:spcAft>
-                <a:spcPts val="600"/>
-              </a:spcAft>
-            </a:pPr>
-            <a:r>
-              <a:rPr sz="1600" b="0">
-                <a:solidFill>
-                  <a:srgbClr val="222222"/>
-                </a:solidFill>
-                <a:latin typeface="맑은 고딕"/>
-              </a:rPr>
-              <a:t>•  Q3. CALIBRATE_IO 전제조건 셋과 유휴 시간에만 수행하는 이유는?</a:t>
-            </a:r>
-          </a:p>
-          <a:p>
-            <a:pPr>
-              <a:spcAft>
-                <a:spcPts val="600"/>
-              </a:spcAft>
-            </a:pPr>
-            <a:r>
-              <a:rPr sz="1600" b="0">
-                <a:solidFill>
-                  <a:srgbClr val="222222"/>
-                </a:solidFill>
-                <a:latin typeface="맑은 고딕"/>
-              </a:rPr>
-              <a:t>•  Q4. BUSY=653492, IDLE=35695635의 CPU 사용률과 '한가하다' 전 확인할 것은?</a:t>
-            </a:r>
-          </a:p>
-          <a:p>
-            <a:pPr>
-              <a:spcAft>
-                <a:spcPts val="600"/>
-              </a:spcAft>
-            </a:pPr>
-            <a:r>
-              <a:rPr sz="1600" b="0">
-                <a:solidFill>
-                  <a:srgbClr val="222222"/>
-                </a:solidFill>
-                <a:latin typeface="맑은 고딕"/>
-              </a:rPr>
-              <a:t>•  Q5. 스와핑 서버에서 SGA를 키우면 안 되는 이유와 올바른 조치 순서는?</a:t>
-            </a:r>
-          </a:p>
-          <a:p>
-            <a:pPr>
-              <a:spcAft>
-                <a:spcPts val="600"/>
-              </a:spcAft>
-            </a:pPr>
-            <a:r>
-              <a:rPr sz="1600" b="0">
-                <a:solidFill>
-                  <a:srgbClr val="222222"/>
-                </a:solidFill>
-                <a:latin typeface="맑은 고딕"/>
-              </a:rPr>
-              <a:t>•  Q6. SQL*Net message from client를 네트워크 병목으로 보면 안 되는 이유는?</a:t>
+            <a:r>
+              <a:rPr sz="1500" b="0">
+                <a:solidFill>
+                  <a:srgbClr val="5A6672"/>
+                </a:solidFill>
+                <a:latin typeface="맑은 고딕"/>
+              </a:rPr>
+              <a:t>Pending Area 에서 만들고 SUBMIT 에서 검증된다 (orcl 19.3 실측)</a:t>
+            </a:r>
+          </a:p>
+        </p:txBody>
+      </p:sp>
+      <p:sp>
+        <p:nvSpPr>
+          <p:cNvPr id="5" name="Rectangle 4"/>
+          <p:cNvSpPr/>
+          <p:nvPr/>
+        </p:nvSpPr>
+        <p:spPr>
+          <a:xfrm>
+            <a:off x="640080" y="1691640"/>
+            <a:ext cx="10881360" cy="4754880"/>
+          </a:xfrm>
+          <a:prstGeom prst="rect">
+            <a:avLst/>
+          </a:prstGeom>
+          <a:solidFill>
+            <a:srgbClr val="1E1E1E"/>
+          </a:solidFill>
+          <a:ln>
+            <a:noFill/>
+          </a:ln>
+          <a:effectLst/>
+        </p:spPr>
+        <p:style>
+          <a:lnRef idx="1">
+            <a:schemeClr val="accent1"/>
+          </a:lnRef>
+          <a:fillRef idx="3">
+            <a:schemeClr val="accent1"/>
+          </a:fillRef>
+          <a:effectRef idx="2">
+            <a:schemeClr val="accent1"/>
+          </a:effectRef>
+          <a:fontRef idx="minor">
+            <a:schemeClr val="lt1"/>
+          </a:fontRef>
+        </p:style>
+        <p:txBody>
+          <a:bodyPr rtlCol="0" anchor="ctr" wrap="square" lIns="101600" tIns="76200"/>
+          <a:lstStyle/>
+          <a:p>
+            <a:pPr algn="ctr">
+              <a:spcAft>
+                <a:spcPts val="0"/>
+              </a:spcAft>
+            </a:pPr>
+            <a:r>
+              <a:rPr sz="1250" b="0">
+                <a:solidFill>
+                  <a:srgbClr val="F2F2F2"/>
+                </a:solidFill>
+                <a:latin typeface="Consolas"/>
+              </a:rPr>
+              <a:t>SYS@orcl&gt; EXEC DBMS_RESOURCE_MANAGER.CREATE_PENDING_AREA();</a:t>
+            </a:r>
+          </a:p>
+          <a:p>
+            <a:pPr>
+              <a:spcAft>
+                <a:spcPts val="0"/>
+              </a:spcAft>
+            </a:pPr>
+            <a:r>
+              <a:rPr sz="1250" b="0">
+                <a:solidFill>
+                  <a:srgbClr val="F2F2F2"/>
+                </a:solidFill>
+                <a:latin typeface="Consolas"/>
+              </a:rPr>
+              <a:t>SYS@orcl&gt; EXEC DBMS_RESOURCE_MANAGER.CREATE_CONSUMER_GROUP('OLTP_GROUP', '...');</a:t>
+            </a:r>
+          </a:p>
+          <a:p>
+            <a:pPr>
+              <a:spcAft>
+                <a:spcPts val="0"/>
+              </a:spcAft>
+            </a:pPr>
+            <a:r>
+              <a:rPr sz="1250" b="0">
+                <a:solidFill>
+                  <a:srgbClr val="F2F2F2"/>
+                </a:solidFill>
+                <a:latin typeface="Consolas"/>
+              </a:rPr>
+              <a:t>SYS@orcl&gt; EXEC DBMS_RESOURCE_MANAGER.CREATE_PLAN('MY_WORK_PLAN', '...');</a:t>
+            </a:r>
+          </a:p>
+          <a:p>
+            <a:pPr>
+              <a:spcAft>
+                <a:spcPts val="0"/>
+              </a:spcAft>
+            </a:pPr>
+            <a:r>
+              <a:rPr sz="1250" b="0">
+                <a:solidFill>
+                  <a:srgbClr val="F2F2F2"/>
+                </a:solidFill>
+                <a:latin typeface="Consolas"/>
+              </a:rPr>
+              <a:t>SYS@orcl&gt; EXEC DBMS_RESOURCE_MANAGER.SUBMIT_PENDING_AREA();</a:t>
+            </a:r>
+          </a:p>
+          <a:p>
+            <a:pPr>
+              <a:spcAft>
+                <a:spcPts val="0"/>
+              </a:spcAft>
+            </a:pPr>
+            <a:r>
+              <a:rPr sz="1250" b="0">
+                <a:solidFill>
+                  <a:srgbClr val="F2F2F2"/>
+                </a:solidFill>
+                <a:latin typeface="Consolas"/>
+              </a:rPr>
+              <a:t>ORA-29377: OTHER_GROUPS 수요자 그룹은 MY_WORK_PLAN 상단 계획에 일부가 아닙니다</a:t>
+            </a:r>
+          </a:p>
+          <a:p>
+            <a:pPr>
+              <a:spcAft>
+                <a:spcPts val="0"/>
+              </a:spcAft>
+            </a:pPr>
+            <a:r>
+              <a:rPr sz="1250" b="0">
+                <a:solidFill>
+                  <a:srgbClr val="F2F2F2"/>
+                </a:solidFill>
+                <a:latin typeface="Consolas"/>
+              </a:rPr>
+              <a:t> </a:t>
+            </a:r>
+          </a:p>
+          <a:p>
+            <a:pPr>
+              <a:spcAft>
+                <a:spcPts val="0"/>
+              </a:spcAft>
+            </a:pPr>
+            <a:r>
+              <a:rPr sz="1250" b="0">
+                <a:solidFill>
+                  <a:srgbClr val="F2F2F2"/>
+                </a:solidFill>
+                <a:latin typeface="Consolas"/>
+              </a:rPr>
+              <a:t>PLAN            GROUP_OR_SUBPLAN      MGMT_P1     ← OTHER_GROUPS 를 넣고 다시</a:t>
+            </a:r>
+          </a:p>
+          <a:p>
+            <a:pPr>
+              <a:spcAft>
+                <a:spcPts val="0"/>
+              </a:spcAft>
+            </a:pPr>
+            <a:r>
+              <a:rPr sz="1250" b="0">
+                <a:solidFill>
+                  <a:srgbClr val="F2F2F2"/>
+                </a:solidFill>
+                <a:latin typeface="Consolas"/>
+              </a:rPr>
+              <a:t>--------------- --------------------- -------</a:t>
+            </a:r>
+          </a:p>
+          <a:p>
+            <a:pPr>
+              <a:spcAft>
+                <a:spcPts val="0"/>
+              </a:spcAft>
+            </a:pPr>
+            <a:r>
+              <a:rPr sz="1250" b="0">
+                <a:solidFill>
+                  <a:srgbClr val="F2F2F2"/>
+                </a:solidFill>
+                <a:latin typeface="Consolas"/>
+              </a:rPr>
+              <a:t>MY_WORK_PLAN    OLTP_GROUP                 70</a:t>
+            </a:r>
+          </a:p>
+          <a:p>
+            <a:pPr>
+              <a:spcAft>
+                <a:spcPts val="0"/>
+              </a:spcAft>
+            </a:pPr>
+            <a:r>
+              <a:rPr sz="1250" b="0">
+                <a:solidFill>
+                  <a:srgbClr val="F2F2F2"/>
+                </a:solidFill>
+                <a:latin typeface="Consolas"/>
+              </a:rPr>
+              <a:t>MY_WORK_PLAN    PTW_BATCH_GROUP            20</a:t>
+            </a:r>
+          </a:p>
+          <a:p>
+            <a:pPr>
+              <a:spcAft>
+                <a:spcPts val="0"/>
+              </a:spcAft>
+            </a:pPr>
+            <a:r>
+              <a:rPr sz="1250" b="0">
+                <a:solidFill>
+                  <a:srgbClr val="F2F2F2"/>
+                </a:solidFill>
+                <a:latin typeface="Consolas"/>
+              </a:rPr>
+              <a:t>MY_WORK_PLAN    OTHER_GROUPS               10     ← 최상위 플랜에 필수</a:t>
             </a:r>
           </a:p>
         </p:txBody>
@@ -11785,7 +12272,7 @@
                 </a:solidFill>
                 <a:latin typeface="맑은 고딕"/>
               </a:rPr>
-              <a:t>요약 (Summary)</a:t>
+              <a:t>플랜을 켜야 동작한다 — 활성 세션 풀</a:t>
             </a:r>
           </a:p>
         </p:txBody>
@@ -11798,8 +12285,8 @@
         </p:nvSpPr>
         <p:spPr>
           <a:xfrm>
-            <a:off x="640080" y="1371600"/>
-            <a:ext cx="10881360" cy="5120640"/>
+            <a:off x="640080" y="1078992"/>
+            <a:ext cx="10881360" cy="457200"/>
           </a:xfrm>
           <a:prstGeom prst="rect">
             <a:avLst/>
@@ -11812,115 +12299,231 @@
           </a:bodyPr>
           <a:lstStyle/>
           <a:p>
-            <a:pPr>
-              <a:spcAft>
-                <a:spcPts val="600"/>
-              </a:spcAft>
-            </a:pPr>
-            <a:r>
-              <a:rPr sz="1600" b="0">
-                <a:solidFill>
-                  <a:srgbClr val="222222"/>
-                </a:solidFill>
-                <a:latin typeface="맑은 고딕"/>
-              </a:rPr>
-              <a:t>•  I/O 편중은 V$FILESTAT·V$IOSTAT_FILE로 상대 비교·델타로 판정한다.</a:t>
-            </a:r>
-          </a:p>
-          <a:p>
-            <a:pPr>
-              <a:spcAft>
-                <a:spcPts val="600"/>
-              </a:spcAft>
-            </a:pPr>
-            <a:r>
-              <a:rPr sz="1600" b="0">
-                <a:solidFill>
-                  <a:srgbClr val="222222"/>
-                </a:solidFill>
-                <a:latin typeface="맑은 고딕"/>
-              </a:rPr>
-              <a:t>•  NOWORKLOAD(MBRC·SREADTIM NULL)이면 CALIBRATE_IO로 스토리지 상한을 실측한다.</a:t>
-            </a:r>
-          </a:p>
-          <a:p>
-            <a:pPr>
-              <a:spcAft>
-                <a:spcPts val="600"/>
-              </a:spcAft>
-            </a:pPr>
-            <a:r>
-              <a:rPr sz="1600" b="0">
-                <a:solidFill>
-                  <a:srgbClr val="222222"/>
-                </a:solidFill>
-                <a:latin typeface="맑은 고딕"/>
-              </a:rPr>
-              <a:t>•  비동기 I/O(disk_asynch_io=TRUE, filesystemio_options=none)·다중 블록 읽기(128)를 점검한다.</a:t>
-            </a:r>
-          </a:p>
-          <a:p>
-            <a:pPr>
-              <a:spcAft>
-                <a:spcPts val="600"/>
-              </a:spcAft>
-            </a:pPr>
-            <a:r>
-              <a:rPr sz="1600" b="0">
-                <a:solidFill>
-                  <a:srgbClr val="222222"/>
-                </a:solidFill>
-                <a:latin typeface="맑은 고딕"/>
-              </a:rPr>
-              <a:t>•  V$OSSTAT로 CPU 사용률(실측 약 1.8%, 무부하)을 계산해 DB Time과 대조한다.</a:t>
-            </a:r>
-          </a:p>
-          <a:p>
-            <a:pPr>
-              <a:spcAft>
-                <a:spcPts val="600"/>
-              </a:spcAft>
-            </a:pPr>
-            <a:r>
-              <a:rPr sz="1600" b="0">
-                <a:solidFill>
-                  <a:srgbClr val="222222"/>
-                </a:solidFill>
-                <a:latin typeface="맑은 고딕"/>
-              </a:rPr>
-              <a:t>•  스와핑 중 SGA 확대는 금지 — 스와핑부터 해소한다.</a:t>
-            </a:r>
-          </a:p>
-          <a:p>
-            <a:pPr>
-              <a:spcAft>
-                <a:spcPts val="600"/>
-              </a:spcAft>
-            </a:pPr>
-            <a:r>
-              <a:rPr sz="1600" b="0">
-                <a:solidFill>
-                  <a:srgbClr val="222222"/>
-                </a:solidFill>
-                <a:latin typeface="맑은 고딕"/>
-              </a:rPr>
-              <a:t>•  SQL*Net message from client는 Idle — 네트워크 오판을 교정한다.</a:t>
-            </a:r>
-          </a:p>
-          <a:p>
-            <a:pPr>
-              <a:spcAft>
-                <a:spcPts val="600"/>
-              </a:spcAft>
-            </a:pPr>
-            <a:r>
-              <a:rPr sz="1600" b="0">
-                <a:solidFill>
-                  <a:srgbClr val="222222"/>
-                </a:solidFill>
-                <a:latin typeface="맑은 고딕"/>
-              </a:rPr>
-              <a:t>•  전 과정은 측정→진단→조치→재측정의 한 순환이다.</a:t>
+            <a:r>
+              <a:rPr sz="1500" b="0">
+                <a:solidFill>
+                  <a:srgbClr val="5A6672"/>
+                </a:solidFill>
+                <a:latin typeface="맑은 고딕"/>
+              </a:rPr>
+              <a:t>정의만 만들면 아무 일도 일어나지 않는다 (풀 1, 세션 2 개 실측)</a:t>
+            </a:r>
+          </a:p>
+        </p:txBody>
+      </p:sp>
+      <p:sp>
+        <p:nvSpPr>
+          <p:cNvPr id="5" name="Rectangle 4"/>
+          <p:cNvSpPr/>
+          <p:nvPr/>
+        </p:nvSpPr>
+        <p:spPr>
+          <a:xfrm>
+            <a:off x="640080" y="1691640"/>
+            <a:ext cx="10881360" cy="4754880"/>
+          </a:xfrm>
+          <a:prstGeom prst="rect">
+            <a:avLst/>
+          </a:prstGeom>
+          <a:solidFill>
+            <a:srgbClr val="1E1E1E"/>
+          </a:solidFill>
+          <a:ln>
+            <a:noFill/>
+          </a:ln>
+          <a:effectLst/>
+        </p:spPr>
+        <p:style>
+          <a:lnRef idx="1">
+            <a:schemeClr val="accent1"/>
+          </a:lnRef>
+          <a:fillRef idx="3">
+            <a:schemeClr val="accent1"/>
+          </a:fillRef>
+          <a:effectRef idx="2">
+            <a:schemeClr val="accent1"/>
+          </a:effectRef>
+          <a:fontRef idx="minor">
+            <a:schemeClr val="lt1"/>
+          </a:fontRef>
+        </p:style>
+        <p:txBody>
+          <a:bodyPr rtlCol="0" anchor="ctr" wrap="square" lIns="101600" tIns="76200"/>
+          <a:lstStyle/>
+          <a:p>
+            <a:pPr algn="ctr">
+              <a:spcAft>
+                <a:spcPts val="0"/>
+              </a:spcAft>
+            </a:pPr>
+            <a:r>
+              <a:rPr sz="1250" b="0">
+                <a:solidFill>
+                  <a:srgbClr val="F2F2F2"/>
+                </a:solidFill>
+                <a:latin typeface="Consolas"/>
+              </a:rPr>
+              <a:t>SYS@orcl&gt; ALTER SYSTEM SET resource_manager_plan = 'MY_WORK_PLAN' SCOPE=MEMORY;</a:t>
+            </a:r>
+          </a:p>
+          <a:p>
+            <a:pPr>
+              <a:spcAft>
+                <a:spcPts val="0"/>
+              </a:spcAft>
+            </a:pPr>
+            <a:r>
+              <a:rPr sz="1250" b="0">
+                <a:solidFill>
+                  <a:srgbClr val="F2F2F2"/>
+                </a:solidFill>
+                <a:latin typeface="Consolas"/>
+              </a:rPr>
+              <a:t>SYS@orcl&gt; SELECT name, cpu_managed FROM v$rsrc_plan;</a:t>
+            </a:r>
+          </a:p>
+          <a:p>
+            <a:pPr>
+              <a:spcAft>
+                <a:spcPts val="0"/>
+              </a:spcAft>
+            </a:pPr>
+            <a:r>
+              <a:rPr sz="1250" b="0">
+                <a:solidFill>
+                  <a:srgbClr val="F2F2F2"/>
+                </a:solidFill>
+                <a:latin typeface="Consolas"/>
+              </a:rPr>
+              <a:t>MY_WORK_PLAN                     ON      ← 켜기 전에는 INTERNAL_PLAN / OFF</a:t>
+            </a:r>
+          </a:p>
+          <a:p>
+            <a:pPr>
+              <a:spcAft>
+                <a:spcPts val="0"/>
+              </a:spcAft>
+            </a:pPr>
+            <a:r>
+              <a:rPr sz="1250" b="0">
+                <a:solidFill>
+                  <a:srgbClr val="F2F2F2"/>
+                </a:solidFill>
+                <a:latin typeface="Consolas"/>
+              </a:rPr>
+              <a:t> </a:t>
+            </a:r>
+          </a:p>
+          <a:p>
+            <a:pPr>
+              <a:spcAft>
+                <a:spcPts val="0"/>
+              </a:spcAft>
+            </a:pPr>
+            <a:r>
+              <a:rPr sz="1250" b="0">
+                <a:solidFill>
+                  <a:srgbClr val="F2F2F2"/>
+                </a:solidFill>
+                <a:latin typeface="Consolas"/>
+              </a:rPr>
+              <a:t>NAME              ACTIVE_SESSIONS QUEUE_LENGTH  풀초과  누적큐ms  타임아웃</a:t>
+            </a:r>
+          </a:p>
+          <a:p>
+            <a:pPr>
+              <a:spcAft>
+                <a:spcPts val="0"/>
+              </a:spcAft>
+            </a:pPr>
+            <a:r>
+              <a:rPr sz="1250" b="0">
+                <a:solidFill>
+                  <a:srgbClr val="F2F2F2"/>
+                </a:solidFill>
+                <a:latin typeface="Consolas"/>
+              </a:rPr>
+              <a:t>----------------- --------------- ------------ ------- --------- --------</a:t>
+            </a:r>
+          </a:p>
+          <a:p>
+            <a:pPr>
+              <a:spcAft>
+                <a:spcPts val="0"/>
+              </a:spcAft>
+            </a:pPr>
+            <a:r>
+              <a:rPr sz="1250" b="0">
+                <a:solidFill>
+                  <a:srgbClr val="F2F2F2"/>
+                </a:solidFill>
+                <a:latin typeface="Consolas"/>
+              </a:rPr>
+              <a:t>PTW_BATCH_GROUP                 1            1       4     39977        1</a:t>
+            </a:r>
+          </a:p>
+          <a:p>
+            <a:pPr>
+              <a:spcAft>
+                <a:spcPts val="0"/>
+              </a:spcAft>
+            </a:pPr>
+            <a:r>
+              <a:rPr sz="1250" b="0">
+                <a:solidFill>
+                  <a:srgbClr val="F2F2F2"/>
+                </a:solidFill>
+                <a:latin typeface="Consolas"/>
+              </a:rPr>
+              <a:t> </a:t>
+            </a:r>
+          </a:p>
+          <a:p>
+            <a:pPr>
+              <a:spcAft>
+                <a:spcPts val="0"/>
+              </a:spcAft>
+            </a:pPr>
+            <a:r>
+              <a:rPr sz="1250" b="0">
+                <a:solidFill>
+                  <a:srgbClr val="F2F2F2"/>
+                </a:solidFill>
+                <a:latin typeface="Consolas"/>
+              </a:rPr>
+              <a:t>V$SESSION   EVENT = resmgr:become active ,  CURRENT_QUEUE_DURATION = 11</a:t>
+            </a:r>
+          </a:p>
+          <a:p>
+            <a:pPr>
+              <a:spcAft>
+                <a:spcPts val="0"/>
+              </a:spcAft>
+            </a:pPr>
+            <a:r>
+              <a:rPr sz="1250" b="0">
+                <a:solidFill>
+                  <a:srgbClr val="F2F2F2"/>
+                </a:solidFill>
+                <a:latin typeface="Consolas"/>
+              </a:rPr>
+              <a:t>큐 30 초(QUEUEING_P1) 초과 → ORA-07454 로 업무가 실패한다</a:t>
+            </a:r>
+          </a:p>
+          <a:p>
+            <a:pPr>
+              <a:spcAft>
+                <a:spcPts val="0"/>
+              </a:spcAft>
+            </a:pPr>
+            <a:r>
+              <a:rPr sz="1250" b="0">
+                <a:solidFill>
+                  <a:srgbClr val="F2F2F2"/>
+                </a:solidFill>
+                <a:latin typeface="Consolas"/>
+              </a:rPr>
+              <a:t>→ 이 네 값(풀초과·누적큐·타임아웃·소비CPU)이 풀 사이징의 근거다</a:t>
             </a:r>
           </a:p>
         </p:txBody>
@@ -12016,7 +12619,7 @@
                 </a:solidFill>
                 <a:latin typeface="맑은 고딕"/>
               </a:rPr>
-              <a:t>실습 개요 (Practice Overview)</a:t>
+              <a:t>실무 — 교재대로 하면 걸리는 곳</a:t>
             </a:r>
           </a:p>
         </p:txBody>
@@ -12029,8 +12632,8 @@
         </p:nvSpPr>
         <p:spPr>
           <a:xfrm>
-            <a:off x="640080" y="1371600"/>
-            <a:ext cx="10881360" cy="5120640"/>
+            <a:off x="640080" y="1078992"/>
+            <a:ext cx="10881360" cy="457200"/>
           </a:xfrm>
           <a:prstGeom prst="rect">
             <a:avLst/>
@@ -12043,19 +12646,500 @@
           </a:bodyPr>
           <a:lstStyle/>
           <a:p>
+            <a:r>
+              <a:rPr sz="1500" b="0">
+                <a:solidFill>
+                  <a:srgbClr val="5A6672"/>
+                </a:solidFill>
+                <a:latin typeface="맑은 고딕"/>
+              </a:rPr>
+              <a:t>19c 에서 실행해 확인한 네 가지</a:t>
+            </a:r>
+          </a:p>
+        </p:txBody>
+      </p:sp>
+      <p:sp>
+        <p:nvSpPr>
+          <p:cNvPr id="5" name="TextBox 4"/>
+          <p:cNvSpPr txBox="1"/>
+          <p:nvPr/>
+        </p:nvSpPr>
+        <p:spPr>
+          <a:xfrm>
+            <a:off x="640080" y="1737360"/>
+            <a:ext cx="10881360" cy="4754879"/>
+          </a:xfrm>
+          <a:prstGeom prst="rect">
+            <a:avLst/>
+          </a:prstGeom>
+          <a:noFill/>
+        </p:spPr>
+        <p:txBody>
+          <a:bodyPr wrap="square">
+            <a:spAutoFit/>
+          </a:bodyPr>
+          <a:lstStyle/>
+          <a:p>
             <a:pPr>
               <a:spcAft>
                 <a:spcPts val="600"/>
               </a:spcAft>
             </a:pPr>
             <a:r>
+              <a:rPr sz="1600" b="0">
+                <a:solidFill>
+                  <a:srgbClr val="222222"/>
+                </a:solidFill>
+                <a:latin typeface="맑은 고딕"/>
+              </a:rPr>
+              <a:t>•  ORA-29357  BATCH_GROUP 등 Oracle 샘플 그룹 6개가 이미 있다 → 접두를 붙인다</a:t>
+            </a:r>
+          </a:p>
+          <a:p>
+            <a:pPr>
+              <a:spcAft>
+                <a:spcPts val="600"/>
+              </a:spcAft>
+            </a:pPr>
+            <a:r>
+              <a:rPr sz="1600" b="0">
+                <a:solidFill>
+                  <a:srgbClr val="222222"/>
+                </a:solidFill>
+                <a:latin typeface="맑은 고딕"/>
+              </a:rPr>
+              <a:t>•  ORA-29377  최상위 플랜에 OTHER_GROUPS 지시어가 없으면 SUBMIT 이 거부된다</a:t>
+            </a:r>
+          </a:p>
+          <a:p>
+            <a:pPr>
+              <a:spcAft>
+                <a:spcPts val="600"/>
+              </a:spcAft>
+            </a:pPr>
+            <a:r>
+              <a:rPr sz="1600" b="0">
+                <a:solidFill>
+                  <a:srgbClr val="222222"/>
+                </a:solidFill>
+                <a:latin typeface="맑은 고딕"/>
+              </a:rPr>
+              <a:t>•  ORA-29375  EMPHASIS 는 레벨당 합 100 초과 금지 (RATIO 는 합계 제한 없음)</a:t>
+            </a:r>
+          </a:p>
+          <a:p>
+            <a:pPr>
+              <a:spcAft>
+                <a:spcPts val="600"/>
+              </a:spcAft>
+            </a:pPr>
+            <a:r>
+              <a:rPr sz="1600" b="0">
+                <a:solidFill>
+                  <a:srgbClr val="222222"/>
+                </a:solidFill>
+                <a:latin typeface="맑은 고딕"/>
+              </a:rPr>
+              <a:t>•  DEFAULT_PLAN 수정은 '된다' — mandatory 는 삭제 금지일 뿐. 자기 플랜에 건다</a:t>
+            </a:r>
+          </a:p>
+        </p:txBody>
+      </p:sp>
+    </p:spTree>
+  </p:cSld>
+  <p:clrMapOvr>
+    <a:masterClrMapping/>
+  </p:clrMapOvr>
+</p:sld>
+</file>
+
+<file path=ppt/slides/slide36.xml><?xml version="1.0" encoding="utf-8"?>
+<p:sld xmlns:a="http://schemas.openxmlformats.org/drawingml/2006/main" xmlns:p="http://schemas.openxmlformats.org/presentationml/2006/main" xmlns:r="http://schemas.openxmlformats.org/officeDocument/2006/relationships">
+  <p:cSld>
+    <p:spTree>
+      <p:nvGrpSpPr>
+        <p:cNvPr id="1" name=""/>
+        <p:cNvGrpSpPr/>
+        <p:nvPr/>
+      </p:nvGrpSpPr>
+      <p:grpSpPr/>
+      <p:sp>
+        <p:nvSpPr>
+          <p:cNvPr id="2" name="Rectangle 1"/>
+          <p:cNvSpPr/>
+          <p:nvPr/>
+        </p:nvSpPr>
+        <p:spPr>
+          <a:xfrm>
+            <a:off x="0" y="0"/>
+            <a:ext cx="12188952" cy="6858000"/>
+          </a:xfrm>
+          <a:prstGeom prst="rect">
+            <a:avLst/>
+          </a:prstGeom>
+          <a:solidFill>
+            <a:srgbClr val="C0392B"/>
+          </a:solidFill>
+          <a:ln>
+            <a:noFill/>
+          </a:ln>
+          <a:effectLst/>
+        </p:spPr>
+        <p:style>
+          <a:lnRef idx="1">
+            <a:schemeClr val="accent1"/>
+          </a:lnRef>
+          <a:fillRef idx="3">
+            <a:schemeClr val="accent1"/>
+          </a:fillRef>
+          <a:effectRef idx="2">
+            <a:schemeClr val="accent1"/>
+          </a:effectRef>
+          <a:fontRef idx="minor">
+            <a:schemeClr val="lt1"/>
+          </a:fontRef>
+        </p:style>
+        <p:txBody>
+          <a:bodyPr rtlCol="0" anchor="ctr"/>
+          <a:lstStyle/>
+          <a:p>
+            <a:pPr algn="ctr"/>
+          </a:p>
+        </p:txBody>
+      </p:sp>
+      <p:sp>
+        <p:nvSpPr>
+          <p:cNvPr id="3" name="TextBox 2"/>
+          <p:cNvSpPr txBox="1"/>
+          <p:nvPr/>
+        </p:nvSpPr>
+        <p:spPr>
+          <a:xfrm>
+            <a:off x="822960" y="2011680"/>
+            <a:ext cx="10515600" cy="1097280"/>
+          </a:xfrm>
+          <a:prstGeom prst="rect">
+            <a:avLst/>
+          </a:prstGeom>
+          <a:noFill/>
+        </p:spPr>
+        <p:txBody>
+          <a:bodyPr wrap="square">
+            <a:spAutoFit/>
+          </a:bodyPr>
+          <a:lstStyle/>
+          <a:p>
+            <a:r>
+              <a:rPr sz="4000" b="1">
+                <a:solidFill>
+                  <a:srgbClr val="FFFFFF"/>
+                </a:solidFill>
+                <a:latin typeface="맑은 고딕"/>
+              </a:rPr>
+              <a:t>34.8</a:t>
+            </a:r>
+          </a:p>
+        </p:txBody>
+      </p:sp>
+      <p:sp>
+        <p:nvSpPr>
+          <p:cNvPr id="4" name="TextBox 3"/>
+          <p:cNvSpPr txBox="1"/>
+          <p:nvPr/>
+        </p:nvSpPr>
+        <p:spPr>
+          <a:xfrm>
+            <a:off x="822960" y="3017520"/>
+            <a:ext cx="10515600" cy="914400"/>
+          </a:xfrm>
+          <a:prstGeom prst="rect">
+            <a:avLst/>
+          </a:prstGeom>
+          <a:noFill/>
+        </p:spPr>
+        <p:txBody>
+          <a:bodyPr wrap="square">
+            <a:spAutoFit/>
+          </a:bodyPr>
+          <a:lstStyle/>
+          <a:p>
+            <a:r>
+              <a:rPr sz="2800" b="1">
+                <a:solidFill>
+                  <a:srgbClr val="FFFFFF"/>
+                </a:solidFill>
+                <a:latin typeface="맑은 고딕"/>
+              </a:rPr>
+              <a:t>측정 → 진단 → 조치 → 재측정</a:t>
+            </a:r>
+          </a:p>
+        </p:txBody>
+      </p:sp>
+      <p:sp>
+        <p:nvSpPr>
+          <p:cNvPr id="5" name="Rectangle 4"/>
+          <p:cNvSpPr/>
+          <p:nvPr/>
+        </p:nvSpPr>
+        <p:spPr>
+          <a:xfrm>
+            <a:off x="822960" y="4114800"/>
+            <a:ext cx="5486400" cy="54864"/>
+          </a:xfrm>
+          <a:prstGeom prst="rect">
+            <a:avLst/>
+          </a:prstGeom>
+          <a:solidFill>
+            <a:srgbClr val="FFFFFF"/>
+          </a:solidFill>
+          <a:ln>
+            <a:noFill/>
+          </a:ln>
+          <a:effectLst/>
+        </p:spPr>
+        <p:style>
+          <a:lnRef idx="1">
+            <a:schemeClr val="accent1"/>
+          </a:lnRef>
+          <a:fillRef idx="3">
+            <a:schemeClr val="accent1"/>
+          </a:fillRef>
+          <a:effectRef idx="2">
+            <a:schemeClr val="accent1"/>
+          </a:effectRef>
+          <a:fontRef idx="minor">
+            <a:schemeClr val="lt1"/>
+          </a:fontRef>
+        </p:style>
+        <p:txBody>
+          <a:bodyPr rtlCol="0" anchor="ctr"/>
+          <a:lstStyle/>
+          <a:p>
+            <a:pPr algn="ctr"/>
+          </a:p>
+        </p:txBody>
+      </p:sp>
+      <p:sp>
+        <p:nvSpPr>
+          <p:cNvPr id="6" name="TextBox 5"/>
+          <p:cNvSpPr txBox="1"/>
+          <p:nvPr/>
+        </p:nvSpPr>
+        <p:spPr>
+          <a:xfrm>
+            <a:off x="822960" y="4297680"/>
+            <a:ext cx="10058400" cy="2011680"/>
+          </a:xfrm>
+          <a:prstGeom prst="rect">
+            <a:avLst/>
+          </a:prstGeom>
+          <a:noFill/>
+        </p:spPr>
+        <p:txBody>
+          <a:bodyPr wrap="square">
+            <a:spAutoFit/>
+          </a:bodyPr>
+          <a:lstStyle/>
+          <a:p>
+            <a:r>
+              <a:rPr sz="1600" b="0">
+                <a:solidFill>
+                  <a:srgbClr val="FFFFFF"/>
+                </a:solidFill>
+                <a:latin typeface="맑은 고딕"/>
+              </a:rPr>
+              <a:t>•  20개 장을 하나의 순환으로</a:t>
+            </a:r>
+          </a:p>
+          <a:p>
+            <a:r>
+              <a:rPr sz="1600" b="0">
+                <a:solidFill>
+                  <a:srgbClr val="FFFFFF"/>
+                </a:solidFill>
+                <a:latin typeface="맑은 고딕"/>
+              </a:rPr>
+              <a:t>•  병목이 DB 안인가 밖인가를 가른다</a:t>
+            </a:r>
+          </a:p>
+          <a:p>
+            <a:r>
+              <a:rPr sz="1600" b="0">
+                <a:solidFill>
+                  <a:srgbClr val="FFFFFF"/>
+                </a:solidFill>
+                <a:latin typeface="맑은 고딕"/>
+              </a:rPr>
+              <a:t>•  근거를 가지고 옳은 팀에 넘긴다</a:t>
+            </a:r>
+          </a:p>
+        </p:txBody>
+      </p:sp>
+    </p:spTree>
+  </p:cSld>
+  <p:clrMapOvr>
+    <a:masterClrMapping/>
+  </p:clrMapOvr>
+</p:sld>
+</file>
+
+<file path=ppt/slides/slide37.xml><?xml version="1.0" encoding="utf-8"?>
+<p:sld xmlns:a="http://schemas.openxmlformats.org/drawingml/2006/main" xmlns:p="http://schemas.openxmlformats.org/presentationml/2006/main" xmlns:r="http://schemas.openxmlformats.org/officeDocument/2006/relationships">
+  <p:cSld>
+    <p:spTree>
+      <p:nvGrpSpPr>
+        <p:cNvPr id="1" name=""/>
+        <p:cNvGrpSpPr/>
+        <p:nvPr/>
+      </p:nvGrpSpPr>
+      <p:grpSpPr/>
+      <p:sp>
+        <p:nvSpPr>
+          <p:cNvPr id="2" name="Rectangle 1"/>
+          <p:cNvSpPr/>
+          <p:nvPr/>
+        </p:nvSpPr>
+        <p:spPr>
+          <a:xfrm>
+            <a:off x="0" y="0"/>
+            <a:ext cx="12188952" cy="1005840"/>
+          </a:xfrm>
+          <a:prstGeom prst="rect">
+            <a:avLst/>
+          </a:prstGeom>
+          <a:solidFill>
+            <a:srgbClr val="C0392B"/>
+          </a:solidFill>
+          <a:ln>
+            <a:noFill/>
+          </a:ln>
+          <a:effectLst/>
+        </p:spPr>
+        <p:style>
+          <a:lnRef idx="1">
+            <a:schemeClr val="accent1"/>
+          </a:lnRef>
+          <a:fillRef idx="3">
+            <a:schemeClr val="accent1"/>
+          </a:fillRef>
+          <a:effectRef idx="2">
+            <a:schemeClr val="accent1"/>
+          </a:effectRef>
+          <a:fontRef idx="minor">
+            <a:schemeClr val="lt1"/>
+          </a:fontRef>
+        </p:style>
+        <p:txBody>
+          <a:bodyPr rtlCol="0" anchor="ctr"/>
+          <a:lstStyle/>
+          <a:p>
+            <a:pPr algn="ctr"/>
+          </a:p>
+        </p:txBody>
+      </p:sp>
+      <p:sp>
+        <p:nvSpPr>
+          <p:cNvPr id="3" name="TextBox 2"/>
+          <p:cNvSpPr txBox="1"/>
+          <p:nvPr/>
+        </p:nvSpPr>
+        <p:spPr>
+          <a:xfrm>
+            <a:off x="548640" y="91440"/>
+            <a:ext cx="10972800" cy="777240"/>
+          </a:xfrm>
+          <a:prstGeom prst="rect">
+            <a:avLst/>
+          </a:prstGeom>
+          <a:noFill/>
+        </p:spPr>
+        <p:txBody>
+          <a:bodyPr wrap="square">
+            <a:spAutoFit/>
+          </a:bodyPr>
+          <a:lstStyle/>
+          <a:p>
+            <a:r>
+              <a:rPr sz="2600" b="1">
+                <a:solidFill>
+                  <a:srgbClr val="FFFFFF"/>
+                </a:solidFill>
+                <a:latin typeface="맑은 고딕"/>
+              </a:rPr>
+              <a:t>과정 전체를 한 번 꿰다</a:t>
+            </a:r>
+          </a:p>
+        </p:txBody>
+      </p:sp>
+      <p:sp>
+        <p:nvSpPr>
+          <p:cNvPr id="4" name="TextBox 3"/>
+          <p:cNvSpPr txBox="1"/>
+          <p:nvPr/>
+        </p:nvSpPr>
+        <p:spPr>
+          <a:xfrm>
+            <a:off x="640080" y="1078992"/>
+            <a:ext cx="10881360" cy="457200"/>
+          </a:xfrm>
+          <a:prstGeom prst="rect">
+            <a:avLst/>
+          </a:prstGeom>
+          <a:noFill/>
+        </p:spPr>
+        <p:txBody>
+          <a:bodyPr wrap="square">
+            <a:spAutoFit/>
+          </a:bodyPr>
+          <a:lstStyle/>
+          <a:p>
+            <a:r>
               <a:rPr sz="1500" b="0">
                 <a:solidFill>
+                  <a:srgbClr val="5A6672"/>
+                </a:solidFill>
+                <a:latin typeface="맑은 고딕"/>
+              </a:rPr>
+              <a:t>ch15에서 ch34까지 하나의 방법론</a:t>
+            </a:r>
+          </a:p>
+        </p:txBody>
+      </p:sp>
+      <p:sp>
+        <p:nvSpPr>
+          <p:cNvPr id="5" name="TextBox 4"/>
+          <p:cNvSpPr txBox="1"/>
+          <p:nvPr/>
+        </p:nvSpPr>
+        <p:spPr>
+          <a:xfrm>
+            <a:off x="640080" y="1737360"/>
+            <a:ext cx="10881360" cy="4754879"/>
+          </a:xfrm>
+          <a:prstGeom prst="rect">
+            <a:avLst/>
+          </a:prstGeom>
+          <a:noFill/>
+        </p:spPr>
+        <p:txBody>
+          <a:bodyPr wrap="square">
+            <a:spAutoFit/>
+          </a:bodyPr>
+          <a:lstStyle/>
+          <a:p>
+            <a:pPr>
+              <a:spcAft>
+                <a:spcPts val="600"/>
+              </a:spcAft>
+            </a:pPr>
+            <a:r>
+              <a:rPr sz="1600" b="0">
+                <a:solidFill>
                   <a:srgbClr val="222222"/>
                 </a:solidFill>
                 <a:latin typeface="맑은 고딕"/>
               </a:rPr>
-              <a:t>•  실습 01 — 데이터파일별 I/O 분포와 편중 판별(V$FILESTAT, WL_02_io)</a:t>
+              <a:t>•  측정: DB Time → 대기 분해 → I/O면 V$FILESTAT, 자원이면 V$OSSTAT</a:t>
             </a:r>
           </a:p>
           <a:p>
@@ -12065,13 +13149,13 @@
               </a:spcAft>
             </a:pPr>
             <a:r>
-              <a:rPr sz="1500" b="0">
+              <a:rPr sz="1600" b="0">
                 <a:solidFill>
                   <a:srgbClr val="222222"/>
                 </a:solidFill>
                 <a:latin typeface="맑은 고딕"/>
               </a:rPr>
-              <a:t>•  실습 02 — I/O 캘리브레이션과 결과 해석(AUX_STATS$·CALIBRATE_IO)</a:t>
+              <a:t>•  진단: 병목이 DB 안(SQL·구성·메모리)인가 밖(스토리지·CPU·메모리·네트워크)인가</a:t>
             </a:r>
           </a:p>
           <a:p>
@@ -12081,13 +13165,13 @@
               </a:spcAft>
             </a:pPr>
             <a:r>
-              <a:rPr sz="1500" b="0">
+              <a:rPr sz="1600" b="0">
                 <a:solidFill>
                   <a:srgbClr val="222222"/>
                 </a:solidFill>
                 <a:latin typeface="맑은 고딕"/>
               </a:rPr>
-              <a:t>•  실습 03 — 비동기 I/O 설정 확인(FILESYSTEMIO_OPTIONS·DISK_ASYNCH_IO)</a:t>
+              <a:t>•  조치: 원인별 처방 — 스와핑이면 SGA를 키우지 않는다</a:t>
             </a:r>
           </a:p>
           <a:p>
@@ -12097,13 +13181,13 @@
               </a:spcAft>
             </a:pPr>
             <a:r>
-              <a:rPr sz="1500" b="0">
+              <a:rPr sz="1600" b="0">
                 <a:solidFill>
                   <a:srgbClr val="222222"/>
                 </a:solidFill>
                 <a:latin typeface="맑은 고딕"/>
               </a:rPr>
-              <a:t>•  실습 04 — 다중 블록 읽기와 전체 스캔(DB_FILE_MULTIBLOCK_READ_COUNT, WL_02_io)</a:t>
+              <a:t>•  재측정: 같은 지표를 델타로 다시 재어 판정 (조치 전 캡처 필수)</a:t>
             </a:r>
           </a:p>
           <a:p>
@@ -12113,15 +13197,134 @@
               </a:spcAft>
             </a:pPr>
             <a:r>
-              <a:rPr sz="1500" b="0">
+              <a:rPr sz="1600" b="0">
                 <a:solidFill>
                   <a:srgbClr val="222222"/>
                 </a:solidFill>
                 <a:latin typeface="맑은 고딕"/>
               </a:rPr>
-              <a:t>•  실습 05 — OS CPU 사용률과 DB 통계 대조(V$OSSTAT)</a:t>
-            </a:r>
-          </a:p>
+              <a:t>•  경계 긋기: SQL은 SQL 튜닝으로, 자원 부족은 인프라 증설로</a:t>
+            </a:r>
+          </a:p>
+        </p:txBody>
+      </p:sp>
+    </p:spTree>
+  </p:cSld>
+  <p:clrMapOvr>
+    <a:masterClrMapping/>
+  </p:clrMapOvr>
+</p:sld>
+</file>
+
+<file path=ppt/slides/slide38.xml><?xml version="1.0" encoding="utf-8"?>
+<p:sld xmlns:a="http://schemas.openxmlformats.org/drawingml/2006/main" xmlns:p="http://schemas.openxmlformats.org/presentationml/2006/main" xmlns:r="http://schemas.openxmlformats.org/officeDocument/2006/relationships">
+  <p:cSld>
+    <p:spTree>
+      <p:nvGrpSpPr>
+        <p:cNvPr id="1" name=""/>
+        <p:cNvGrpSpPr/>
+        <p:nvPr/>
+      </p:nvGrpSpPr>
+      <p:grpSpPr/>
+      <p:sp>
+        <p:nvSpPr>
+          <p:cNvPr id="2" name="Rectangle 1"/>
+          <p:cNvSpPr/>
+          <p:nvPr/>
+        </p:nvSpPr>
+        <p:spPr>
+          <a:xfrm>
+            <a:off x="0" y="0"/>
+            <a:ext cx="12188952" cy="1005840"/>
+          </a:xfrm>
+          <a:prstGeom prst="rect">
+            <a:avLst/>
+          </a:prstGeom>
+          <a:solidFill>
+            <a:srgbClr val="C0392B"/>
+          </a:solidFill>
+          <a:ln>
+            <a:noFill/>
+          </a:ln>
+          <a:effectLst/>
+        </p:spPr>
+        <p:style>
+          <a:lnRef idx="1">
+            <a:schemeClr val="accent1"/>
+          </a:lnRef>
+          <a:fillRef idx="3">
+            <a:schemeClr val="accent1"/>
+          </a:fillRef>
+          <a:effectRef idx="2">
+            <a:schemeClr val="accent1"/>
+          </a:effectRef>
+          <a:fontRef idx="minor">
+            <a:schemeClr val="lt1"/>
+          </a:fontRef>
+        </p:style>
+        <p:txBody>
+          <a:bodyPr rtlCol="0" anchor="ctr"/>
+          <a:lstStyle/>
+          <a:p>
+            <a:pPr algn="ctr"/>
+          </a:p>
+        </p:txBody>
+      </p:sp>
+      <p:sp>
+        <p:nvSpPr>
+          <p:cNvPr id="3" name="TextBox 2"/>
+          <p:cNvSpPr txBox="1"/>
+          <p:nvPr/>
+        </p:nvSpPr>
+        <p:spPr>
+          <a:xfrm>
+            <a:off x="548640" y="91440"/>
+            <a:ext cx="10972800" cy="777240"/>
+          </a:xfrm>
+          <a:prstGeom prst="rect">
+            <a:avLst/>
+          </a:prstGeom>
+          <a:noFill/>
+        </p:spPr>
+        <p:txBody>
+          <a:bodyPr wrap="square">
+            <a:spAutoFit/>
+          </a:bodyPr>
+          <a:lstStyle/>
+          <a:p>
+            <a:r>
+              <a:rPr sz="2600" b="1">
+                <a:solidFill>
+                  <a:srgbClr val="FFFFFF"/>
+                </a:solidFill>
+                <a:latin typeface="맑은 고딕"/>
+              </a:rPr>
+              <a:t>퀴즈 (Quiz)</a:t>
+            </a:r>
+          </a:p>
+        </p:txBody>
+      </p:sp>
+      <p:sp>
+        <p:nvSpPr>
+          <p:cNvPr id="4" name="TextBox 3"/>
+          <p:cNvSpPr txBox="1"/>
+          <p:nvPr/>
+        </p:nvSpPr>
+        <p:spPr>
+          <a:xfrm>
+            <a:off x="640080" y="1371600"/>
+            <a:ext cx="10881360" cy="5120640"/>
+          </a:xfrm>
+          <a:prstGeom prst="rect">
+            <a:avLst/>
+          </a:prstGeom>
+          <a:noFill/>
+        </p:spPr>
+        <p:txBody>
+          <a:bodyPr wrap="square">
+            <a:spAutoFit/>
+          </a:bodyPr>
+          <a:lstStyle/>
           <a:p>
             <a:pPr>
               <a:spcAft>
@@ -12129,13 +13332,13 @@
               </a:spcAft>
             </a:pPr>
             <a:r>
-              <a:rPr sz="1500" b="0">
+              <a:rPr sz="1600" b="0">
                 <a:solidFill>
                   <a:srgbClr val="222222"/>
                 </a:solidFill>
                 <a:latin typeface="맑은 고딕"/>
               </a:rPr>
-              <a:t>•  실습 06 — 메모리 스와핑 징후와 SGA 재검토</a:t>
+              <a:t>•  Q1. undo=쓰기·system=읽기 편중이 문제가 아닌 이유는?</a:t>
             </a:r>
           </a:p>
           <a:p>
@@ -12145,13 +13348,13 @@
               </a:spcAft>
             </a:pPr>
             <a:r>
-              <a:rPr sz="1500" b="0">
+              <a:rPr sz="1600" b="0">
                 <a:solidFill>
                   <a:srgbClr val="222222"/>
                 </a:solidFill>
                 <a:latin typeface="맑은 고딕"/>
               </a:rPr>
-              <a:t>•  실습 07 — 네트워크 지연 판별(SQL*Net message from client)</a:t>
+              <a:t>•  Q2. MBRC·SREADTIM·MREADTIM이 NULL이면 무엇을 뜻하고 무엇을 하는가?</a:t>
             </a:r>
           </a:p>
           <a:p>
@@ -12161,13 +13364,308 @@
               </a:spcAft>
             </a:pPr>
             <a:r>
-              <a:rPr sz="1500" b="0">
+              <a:rPr sz="1600" b="0">
                 <a:solidFill>
                   <a:srgbClr val="222222"/>
                 </a:solidFill>
                 <a:latin typeface="맑은 고딕"/>
               </a:rPr>
-              <a:t>•  ※ 환경: non-CDB orcl 19.3 · 프롬프트 SYS@orcl&gt;/SQLT@orcl&gt; · 조치 전→조회→해석 + 오류 흐름</a:t>
+              <a:t>•  Q3. CALIBRATE_IO 전제조건 셋과 유휴 시간에만 수행하는 이유는?</a:t>
+            </a:r>
+          </a:p>
+          <a:p>
+            <a:pPr>
+              <a:spcAft>
+                <a:spcPts val="600"/>
+              </a:spcAft>
+            </a:pPr>
+            <a:r>
+              <a:rPr sz="1600" b="0">
+                <a:solidFill>
+                  <a:srgbClr val="222222"/>
+                </a:solidFill>
+                <a:latin typeface="맑은 고딕"/>
+              </a:rPr>
+              <a:t>•  Q4. BUSY=653492, IDLE=35695635의 CPU 사용률과 '한가하다' 전 확인할 것은?</a:t>
+            </a:r>
+          </a:p>
+          <a:p>
+            <a:pPr>
+              <a:spcAft>
+                <a:spcPts val="600"/>
+              </a:spcAft>
+            </a:pPr>
+            <a:r>
+              <a:rPr sz="1600" b="0">
+                <a:solidFill>
+                  <a:srgbClr val="222222"/>
+                </a:solidFill>
+                <a:latin typeface="맑은 고딕"/>
+              </a:rPr>
+              <a:t>•  Q5. 스와핑 서버에서 SGA를 키우면 안 되는 이유와 올바른 조치 순서는?</a:t>
+            </a:r>
+          </a:p>
+          <a:p>
+            <a:pPr>
+              <a:spcAft>
+                <a:spcPts val="600"/>
+              </a:spcAft>
+            </a:pPr>
+            <a:r>
+              <a:rPr sz="1600" b="0">
+                <a:solidFill>
+                  <a:srgbClr val="222222"/>
+                </a:solidFill>
+                <a:latin typeface="맑은 고딕"/>
+              </a:rPr>
+              <a:t>•  Q6. SQL*Net message from client를 네트워크 병목으로 보면 안 되는 이유는?</a:t>
+            </a:r>
+          </a:p>
+        </p:txBody>
+      </p:sp>
+    </p:spTree>
+  </p:cSld>
+  <p:clrMapOvr>
+    <a:masterClrMapping/>
+  </p:clrMapOvr>
+</p:sld>
+</file>
+
+<file path=ppt/slides/slide39.xml><?xml version="1.0" encoding="utf-8"?>
+<p:sld xmlns:a="http://schemas.openxmlformats.org/drawingml/2006/main" xmlns:p="http://schemas.openxmlformats.org/presentationml/2006/main" xmlns:r="http://schemas.openxmlformats.org/officeDocument/2006/relationships">
+  <p:cSld>
+    <p:spTree>
+      <p:nvGrpSpPr>
+        <p:cNvPr id="1" name=""/>
+        <p:cNvGrpSpPr/>
+        <p:nvPr/>
+      </p:nvGrpSpPr>
+      <p:grpSpPr/>
+      <p:sp>
+        <p:nvSpPr>
+          <p:cNvPr id="2" name="Rectangle 1"/>
+          <p:cNvSpPr/>
+          <p:nvPr/>
+        </p:nvSpPr>
+        <p:spPr>
+          <a:xfrm>
+            <a:off x="0" y="0"/>
+            <a:ext cx="12188952" cy="1005840"/>
+          </a:xfrm>
+          <a:prstGeom prst="rect">
+            <a:avLst/>
+          </a:prstGeom>
+          <a:solidFill>
+            <a:srgbClr val="C0392B"/>
+          </a:solidFill>
+          <a:ln>
+            <a:noFill/>
+          </a:ln>
+          <a:effectLst/>
+        </p:spPr>
+        <p:style>
+          <a:lnRef idx="1">
+            <a:schemeClr val="accent1"/>
+          </a:lnRef>
+          <a:fillRef idx="3">
+            <a:schemeClr val="accent1"/>
+          </a:fillRef>
+          <a:effectRef idx="2">
+            <a:schemeClr val="accent1"/>
+          </a:effectRef>
+          <a:fontRef idx="minor">
+            <a:schemeClr val="lt1"/>
+          </a:fontRef>
+        </p:style>
+        <p:txBody>
+          <a:bodyPr rtlCol="0" anchor="ctr"/>
+          <a:lstStyle/>
+          <a:p>
+            <a:pPr algn="ctr"/>
+          </a:p>
+        </p:txBody>
+      </p:sp>
+      <p:sp>
+        <p:nvSpPr>
+          <p:cNvPr id="3" name="TextBox 2"/>
+          <p:cNvSpPr txBox="1"/>
+          <p:nvPr/>
+        </p:nvSpPr>
+        <p:spPr>
+          <a:xfrm>
+            <a:off x="548640" y="91440"/>
+            <a:ext cx="10972800" cy="777240"/>
+          </a:xfrm>
+          <a:prstGeom prst="rect">
+            <a:avLst/>
+          </a:prstGeom>
+          <a:noFill/>
+        </p:spPr>
+        <p:txBody>
+          <a:bodyPr wrap="square">
+            <a:spAutoFit/>
+          </a:bodyPr>
+          <a:lstStyle/>
+          <a:p>
+            <a:r>
+              <a:rPr sz="2600" b="1">
+                <a:solidFill>
+                  <a:srgbClr val="FFFFFF"/>
+                </a:solidFill>
+                <a:latin typeface="맑은 고딕"/>
+              </a:rPr>
+              <a:t>요약 (Summary)</a:t>
+            </a:r>
+          </a:p>
+        </p:txBody>
+      </p:sp>
+      <p:sp>
+        <p:nvSpPr>
+          <p:cNvPr id="4" name="TextBox 3"/>
+          <p:cNvSpPr txBox="1"/>
+          <p:nvPr/>
+        </p:nvSpPr>
+        <p:spPr>
+          <a:xfrm>
+            <a:off x="640080" y="1371600"/>
+            <a:ext cx="10881360" cy="5120640"/>
+          </a:xfrm>
+          <a:prstGeom prst="rect">
+            <a:avLst/>
+          </a:prstGeom>
+          <a:noFill/>
+        </p:spPr>
+        <p:txBody>
+          <a:bodyPr wrap="square">
+            <a:spAutoFit/>
+          </a:bodyPr>
+          <a:lstStyle/>
+          <a:p>
+            <a:pPr>
+              <a:spcAft>
+                <a:spcPts val="600"/>
+              </a:spcAft>
+            </a:pPr>
+            <a:r>
+              <a:rPr sz="1600" b="0">
+                <a:solidFill>
+                  <a:srgbClr val="222222"/>
+                </a:solidFill>
+                <a:latin typeface="맑은 고딕"/>
+              </a:rPr>
+              <a:t>•  I/O 편중은 V$FILESTAT·V$IOSTAT_FILE로 상대 비교·델타로 판정한다.</a:t>
+            </a:r>
+          </a:p>
+          <a:p>
+            <a:pPr>
+              <a:spcAft>
+                <a:spcPts val="600"/>
+              </a:spcAft>
+            </a:pPr>
+            <a:r>
+              <a:rPr sz="1600" b="0">
+                <a:solidFill>
+                  <a:srgbClr val="222222"/>
+                </a:solidFill>
+                <a:latin typeface="맑은 고딕"/>
+              </a:rPr>
+              <a:t>•  NOWORKLOAD(MBRC·SREADTIM NULL)이면 CALIBRATE_IO로 스토리지 상한을 실측한다.</a:t>
+            </a:r>
+          </a:p>
+          <a:p>
+            <a:pPr>
+              <a:spcAft>
+                <a:spcPts val="600"/>
+              </a:spcAft>
+            </a:pPr>
+            <a:r>
+              <a:rPr sz="1600" b="0">
+                <a:solidFill>
+                  <a:srgbClr val="222222"/>
+                </a:solidFill>
+                <a:latin typeface="맑은 고딕"/>
+              </a:rPr>
+              <a:t>•  비동기 I/O(disk_asynch_io=TRUE, filesystemio_options=none)·다중 블록 읽기(128)를 점검한다.</a:t>
+            </a:r>
+          </a:p>
+          <a:p>
+            <a:pPr>
+              <a:spcAft>
+                <a:spcPts val="600"/>
+              </a:spcAft>
+            </a:pPr>
+            <a:r>
+              <a:rPr sz="1600" b="0">
+                <a:solidFill>
+                  <a:srgbClr val="222222"/>
+                </a:solidFill>
+                <a:latin typeface="맑은 고딕"/>
+              </a:rPr>
+              <a:t>•  V$OSSTAT로 CPU 사용률(실측 약 1.8%, 무부하)을 계산해 DB Time과 대조한다.</a:t>
+            </a:r>
+          </a:p>
+          <a:p>
+            <a:pPr>
+              <a:spcAft>
+                <a:spcPts val="600"/>
+              </a:spcAft>
+            </a:pPr>
+            <a:r>
+              <a:rPr sz="1600" b="0">
+                <a:solidFill>
+                  <a:srgbClr val="222222"/>
+                </a:solidFill>
+                <a:latin typeface="맑은 고딕"/>
+              </a:rPr>
+              <a:t>•  스와핑 중 SGA 확대는 금지 — 스와핑부터 해소한다.</a:t>
+            </a:r>
+          </a:p>
+          <a:p>
+            <a:pPr>
+              <a:spcAft>
+                <a:spcPts val="600"/>
+              </a:spcAft>
+            </a:pPr>
+            <a:r>
+              <a:rPr sz="1600" b="0">
+                <a:solidFill>
+                  <a:srgbClr val="222222"/>
+                </a:solidFill>
+                <a:latin typeface="맑은 고딕"/>
+              </a:rPr>
+              <a:t>•  SQL*Net message from client는 Idle — 네트워크 오판을 교정한다.</a:t>
+            </a:r>
+          </a:p>
+          <a:p>
+            <a:pPr>
+              <a:spcAft>
+                <a:spcPts val="600"/>
+              </a:spcAft>
+            </a:pPr>
+            <a:r>
+              <a:rPr sz="1600" b="0">
+                <a:solidFill>
+                  <a:srgbClr val="222222"/>
+                </a:solidFill>
+                <a:latin typeface="맑은 고딕"/>
+              </a:rPr>
+              <a:t>•  리소스 관리자는 소비자 그룹·플랜·지시어로 CPU 와 동시 세션을 나눈다 — 플랜을 켜야 동작한다.</a:t>
+            </a:r>
+          </a:p>
+          <a:p>
+            <a:pPr>
+              <a:spcAft>
+                <a:spcPts val="600"/>
+              </a:spcAft>
+            </a:pPr>
+            <a:r>
+              <a:rPr sz="1600" b="0">
+                <a:solidFill>
+                  <a:srgbClr val="222222"/>
+                </a:solidFill>
+                <a:latin typeface="맑은 고딕"/>
+              </a:rPr>
+              <a:t>•  전 과정은 측정→진단→조치→재측정의 한 순환이다.</a:t>
             </a:r>
           </a:p>
         </p:txBody>
@@ -12398,6 +13896,269 @@
                 <a:latin typeface="맑은 고딕"/>
               </a:rPr>
               <a:t>•  V$IOSTAT_FILE — 파일 유형별 소량/대량 읽기</a:t>
+            </a:r>
+          </a:p>
+        </p:txBody>
+      </p:sp>
+    </p:spTree>
+  </p:cSld>
+  <p:clrMapOvr>
+    <a:masterClrMapping/>
+  </p:clrMapOvr>
+</p:sld>
+</file>
+
+<file path=ppt/slides/slide40.xml><?xml version="1.0" encoding="utf-8"?>
+<p:sld xmlns:a="http://schemas.openxmlformats.org/drawingml/2006/main" xmlns:p="http://schemas.openxmlformats.org/presentationml/2006/main" xmlns:r="http://schemas.openxmlformats.org/officeDocument/2006/relationships">
+  <p:cSld>
+    <p:spTree>
+      <p:nvGrpSpPr>
+        <p:cNvPr id="1" name=""/>
+        <p:cNvGrpSpPr/>
+        <p:nvPr/>
+      </p:nvGrpSpPr>
+      <p:grpSpPr/>
+      <p:sp>
+        <p:nvSpPr>
+          <p:cNvPr id="2" name="Rectangle 1"/>
+          <p:cNvSpPr/>
+          <p:nvPr/>
+        </p:nvSpPr>
+        <p:spPr>
+          <a:xfrm>
+            <a:off x="0" y="0"/>
+            <a:ext cx="12188952" cy="1005840"/>
+          </a:xfrm>
+          <a:prstGeom prst="rect">
+            <a:avLst/>
+          </a:prstGeom>
+          <a:solidFill>
+            <a:srgbClr val="C0392B"/>
+          </a:solidFill>
+          <a:ln>
+            <a:noFill/>
+          </a:ln>
+          <a:effectLst/>
+        </p:spPr>
+        <p:style>
+          <a:lnRef idx="1">
+            <a:schemeClr val="accent1"/>
+          </a:lnRef>
+          <a:fillRef idx="3">
+            <a:schemeClr val="accent1"/>
+          </a:fillRef>
+          <a:effectRef idx="2">
+            <a:schemeClr val="accent1"/>
+          </a:effectRef>
+          <a:fontRef idx="minor">
+            <a:schemeClr val="lt1"/>
+          </a:fontRef>
+        </p:style>
+        <p:txBody>
+          <a:bodyPr rtlCol="0" anchor="ctr"/>
+          <a:lstStyle/>
+          <a:p>
+            <a:pPr algn="ctr"/>
+          </a:p>
+        </p:txBody>
+      </p:sp>
+      <p:sp>
+        <p:nvSpPr>
+          <p:cNvPr id="3" name="TextBox 2"/>
+          <p:cNvSpPr txBox="1"/>
+          <p:nvPr/>
+        </p:nvSpPr>
+        <p:spPr>
+          <a:xfrm>
+            <a:off x="548640" y="91440"/>
+            <a:ext cx="10972800" cy="777240"/>
+          </a:xfrm>
+          <a:prstGeom prst="rect">
+            <a:avLst/>
+          </a:prstGeom>
+          <a:noFill/>
+        </p:spPr>
+        <p:txBody>
+          <a:bodyPr wrap="square">
+            <a:spAutoFit/>
+          </a:bodyPr>
+          <a:lstStyle/>
+          <a:p>
+            <a:r>
+              <a:rPr sz="2600" b="1">
+                <a:solidFill>
+                  <a:srgbClr val="FFFFFF"/>
+                </a:solidFill>
+                <a:latin typeface="맑은 고딕"/>
+              </a:rPr>
+              <a:t>실습 개요 (Practice Overview)</a:t>
+            </a:r>
+          </a:p>
+        </p:txBody>
+      </p:sp>
+      <p:sp>
+        <p:nvSpPr>
+          <p:cNvPr id="4" name="TextBox 3"/>
+          <p:cNvSpPr txBox="1"/>
+          <p:nvPr/>
+        </p:nvSpPr>
+        <p:spPr>
+          <a:xfrm>
+            <a:off x="640080" y="1371600"/>
+            <a:ext cx="10881360" cy="5120640"/>
+          </a:xfrm>
+          <a:prstGeom prst="rect">
+            <a:avLst/>
+          </a:prstGeom>
+          <a:noFill/>
+        </p:spPr>
+        <p:txBody>
+          <a:bodyPr wrap="square">
+            <a:spAutoFit/>
+          </a:bodyPr>
+          <a:lstStyle/>
+          <a:p>
+            <a:pPr>
+              <a:spcAft>
+                <a:spcPts val="600"/>
+              </a:spcAft>
+            </a:pPr>
+            <a:r>
+              <a:rPr sz="1500" b="0">
+                <a:solidFill>
+                  <a:srgbClr val="222222"/>
+                </a:solidFill>
+                <a:latin typeface="맑은 고딕"/>
+              </a:rPr>
+              <a:t>•  실습 01 — 데이터파일별 I/O 분포와 편중 판별(V$FILESTAT, WL_02_io)</a:t>
+            </a:r>
+          </a:p>
+          <a:p>
+            <a:pPr>
+              <a:spcAft>
+                <a:spcPts val="600"/>
+              </a:spcAft>
+            </a:pPr>
+            <a:r>
+              <a:rPr sz="1500" b="0">
+                <a:solidFill>
+                  <a:srgbClr val="222222"/>
+                </a:solidFill>
+                <a:latin typeface="맑은 고딕"/>
+              </a:rPr>
+              <a:t>•  실습 02 — I/O 캘리브레이션과 결과 해석(AUX_STATS$·CALIBRATE_IO)</a:t>
+            </a:r>
+          </a:p>
+          <a:p>
+            <a:pPr>
+              <a:spcAft>
+                <a:spcPts val="600"/>
+              </a:spcAft>
+            </a:pPr>
+            <a:r>
+              <a:rPr sz="1500" b="0">
+                <a:solidFill>
+                  <a:srgbClr val="222222"/>
+                </a:solidFill>
+                <a:latin typeface="맑은 고딕"/>
+              </a:rPr>
+              <a:t>•  실습 03 — 비동기 I/O 설정 확인(FILESYSTEMIO_OPTIONS·DISK_ASYNCH_IO)</a:t>
+            </a:r>
+          </a:p>
+          <a:p>
+            <a:pPr>
+              <a:spcAft>
+                <a:spcPts val="600"/>
+              </a:spcAft>
+            </a:pPr>
+            <a:r>
+              <a:rPr sz="1500" b="0">
+                <a:solidFill>
+                  <a:srgbClr val="222222"/>
+                </a:solidFill>
+                <a:latin typeface="맑은 고딕"/>
+              </a:rPr>
+              <a:t>•  실습 04 — 다중 블록 읽기와 전체 스캔(DB_FILE_MULTIBLOCK_READ_COUNT, WL_02_io)</a:t>
+            </a:r>
+          </a:p>
+          <a:p>
+            <a:pPr>
+              <a:spcAft>
+                <a:spcPts val="600"/>
+              </a:spcAft>
+            </a:pPr>
+            <a:r>
+              <a:rPr sz="1500" b="0">
+                <a:solidFill>
+                  <a:srgbClr val="222222"/>
+                </a:solidFill>
+                <a:latin typeface="맑은 고딕"/>
+              </a:rPr>
+              <a:t>•  실습 05 — OS CPU 사용률과 DB 통계 대조(V$OSSTAT)</a:t>
+            </a:r>
+          </a:p>
+          <a:p>
+            <a:pPr>
+              <a:spcAft>
+                <a:spcPts val="600"/>
+              </a:spcAft>
+            </a:pPr>
+            <a:r>
+              <a:rPr sz="1500" b="0">
+                <a:solidFill>
+                  <a:srgbClr val="222222"/>
+                </a:solidFill>
+                <a:latin typeface="맑은 고딕"/>
+              </a:rPr>
+              <a:t>•  실습 06 — 메모리 스와핑 징후와 SGA 재검토</a:t>
+            </a:r>
+          </a:p>
+          <a:p>
+            <a:pPr>
+              <a:spcAft>
+                <a:spcPts val="600"/>
+              </a:spcAft>
+            </a:pPr>
+            <a:r>
+              <a:rPr sz="1500" b="0">
+                <a:solidFill>
+                  <a:srgbClr val="222222"/>
+                </a:solidFill>
+                <a:latin typeface="맑은 고딕"/>
+              </a:rPr>
+              <a:t>•  실습 07 — 네트워크 지연 판별(SQL*Net message from client)</a:t>
+            </a:r>
+          </a:p>
+          <a:p>
+            <a:pPr>
+              <a:spcAft>
+                <a:spcPts val="600"/>
+              </a:spcAft>
+            </a:pPr>
+            <a:r>
+              <a:rPr sz="1500" b="0">
+                <a:solidFill>
+                  <a:srgbClr val="222222"/>
+                </a:solidFill>
+                <a:latin typeface="맑은 고딕"/>
+              </a:rPr>
+              <a:t>•  실습 08 — 리소스 관리자: CPU 할당과 활성 세션 풀(DBMS_RESOURCE_MANAGER, V$RSRC_*)</a:t>
+            </a:r>
+          </a:p>
+          <a:p>
+            <a:pPr>
+              <a:spcAft>
+                <a:spcPts val="600"/>
+              </a:spcAft>
+            </a:pPr>
+            <a:r>
+              <a:rPr sz="1500" b="0">
+                <a:solidFill>
+                  <a:srgbClr val="222222"/>
+                </a:solidFill>
+                <a:latin typeface="맑은 고딕"/>
+              </a:rPr>
+              <a:t>•  ※ 환경: non-CDB orcl 19.3 · 프롬프트 SYS@orcl&gt;/SQLT@orcl&gt; · 조치 전→조회→해석 + 오류 흐름</a:t>
             </a:r>
           </a:p>
         </p:txBody>
